--- a/content/W03/SAT/slides/C2_W03_SAT_presentation_format_STUDENT.pptx
+++ b/content/W03/SAT/slides/C2_W03_SAT_presentation_format_STUDENT.pptx
@@ -29,6 +29,7 @@
     <p:sldId id="277" r:id="rId29"/>
     <p:sldId id="278" r:id="rId30"/>
     <p:sldId id="279" r:id="rId31"/>
+    <p:sldId id="280" r:id="rId32"/>
   </p:sldIdLst>
   <p:sldSz cx="12191695" cy="6858000" type="screen4x3"/>
   <p:notesSz cx="6858000" cy="9144000"/>
@@ -1055,12 +1056,27 @@
           <a:lstStyle/>
           <a:p>
             <a:r>
-              <a:t>A demo that fails and is explained honestly in one sentence is better evidence of understanding</a:t>
-            </a:r>
-          </a:p>
-          <a:p>
-            <a:r>
-              <a:t>than a demo that is rerun until it works. There is no second run.</a:t>
+              <a:t>The rule, word for word: a group's demo runs once, cold, on its raw files. If it fails, the group</a:t>
+            </a:r>
+          </a:p>
+          <a:p>
+            <a:r>
+              <a:t>has two minutes to recover it live, as it would in front of a client. If it still fails, the group</a:t>
+            </a:r>
+          </a:p>
+          <a:p>
+            <a:r>
+              <a:t>presents from its executed notebook, and the panel scores the live demo in presentation and defence</a:t>
+            </a:r>
+          </a:p>
+          <a:p>
+            <a:r>
+              <a:t>as not run cold. The other 34 marks of the mini project are scored from the executed run, so a</a:t>
+            </a:r>
+          </a:p>
+          <a:p>
+            <a:r>
+              <a:t>failed demo costs its own marks and never the analysis.</a:t>
             </a:r>
           </a:p>
         </p:txBody>
@@ -1130,7 +1146,7 @@
           <a:lstStyle/>
           <a:p>
             <a:r>
-              <a:t>Thirty seconds. Most rooms get c; d is the one worth discussing.</a:t>
+              <a:t>Thirty seconds. Most rooms split between c and d; the two-minute limit is what separates them.</a:t>
             </a:r>
           </a:p>
         </p:txBody>
@@ -1200,12 +1216,17 @@
           <a:lstStyle/>
           <a:p>
             <a:r>
-              <a:t>The answer is c. On d: a group whose demo breaks names the cause and moves on; the panel can ask</a:t>
-            </a:r>
-          </a:p>
-          <a:p>
-            <a:r>
-              <a:t>about the fix in questions.</a:t>
+              <a:t>The answer is d. If the demo still fails after two minutes, the group presents from its executed</a:t>
+            </a:r>
+          </a:p>
+          <a:p>
+            <a:r>
+              <a:t>notebook and the panel scores the live demo in presentation and defence as not run cold; the other</a:t>
+            </a:r>
+          </a:p>
+          <a:p>
+            <a:r>
+              <a:t>34 marks are scored from the executed run, so a failed demo costs its own marks and never the analysis.</a:t>
             </a:r>
           </a:p>
         </p:txBody>
@@ -1741,6 +1762,81 @@
           <a:p>
             <a:r>
               <a:t>same for every group.</a:t>
+            </a:r>
+          </a:p>
+        </p:txBody>
+      </p:sp>
+      <p:sp>
+        <p:nvSpPr>
+          <p:cNvPr id="4" name="Slide Number Placeholder 3"/>
+          <p:cNvSpPr>
+            <a:spLocks noGrp="1"/>
+          </p:cNvSpPr>
+          <p:nvPr>
+            <p:ph type="sldNum" idx="5" sz="quarter"/>
+          </p:nvPr>
+        </p:nvSpPr>
+        <p:spPr/>
+      </p:sp>
+    </p:spTree>
+  </p:cSld>
+  <p:clrMapOvr>
+    <a:masterClrMapping/>
+  </p:clrMapOvr>
+</p:notes>
+</file>
+
+<file path=ppt/notesSlides/notesSlide25.xml><?xml version="1.0" encoding="utf-8"?>
+<p:notes xmlns:a="http://schemas.openxmlformats.org/drawingml/2006/main" xmlns:p="http://schemas.openxmlformats.org/presentationml/2006/main" xmlns:r="http://schemas.openxmlformats.org/officeDocument/2006/relationships">
+  <p:cSld>
+    <p:spTree>
+      <p:nvGrpSpPr>
+        <p:cNvPr id="1" name=""/>
+        <p:cNvGrpSpPr/>
+        <p:nvPr/>
+      </p:nvGrpSpPr>
+      <p:grpSpPr>
+        <a:xfrm>
+          <a:off x="0" y="0"/>
+          <a:ext cx="0" cy="0"/>
+          <a:chOff x="0" y="0"/>
+          <a:chExt cx="0" cy="0"/>
+        </a:xfrm>
+      </p:grpSpPr>
+      <p:sp>
+        <p:nvSpPr>
+          <p:cNvPr id="2" name="Slide Image Placeholder 1"/>
+          <p:cNvSpPr>
+            <a:spLocks noGrp="1"/>
+          </p:cNvSpPr>
+          <p:nvPr>
+            <p:ph type="sldImg" idx="2"/>
+          </p:nvPr>
+        </p:nvSpPr>
+        <p:spPr/>
+      </p:sp>
+      <p:sp>
+        <p:nvSpPr>
+          <p:cNvPr id="3" name="Notes Placeholder 2"/>
+          <p:cNvSpPr>
+            <a:spLocks noGrp="1"/>
+          </p:cNvSpPr>
+          <p:nvPr>
+            <p:ph type="body" idx="3" sz="quarter"/>
+          </p:nvPr>
+        </p:nvSpPr>
+        <p:spPr/>
+        <p:txBody>
+          <a:bodyPr/>
+          <a:lstStyle/>
+          <a:p>
+            <a:r>
+              <a:t>Point groups to the last row: the live demo sits inside presentation and defence, so a demo that</a:t>
+            </a:r>
+          </a:p>
+          <a:p>
+            <a:r>
+              <a:t>fails after its two minutes costs those marks and leaves the other 34 to the executed run.</a:t>
             </a:r>
           </a:p>
         </p:txBody>
@@ -6018,7 +6114,7 @@
                 </a:solidFill>
                 <a:latin typeface="Calibri"/>
               </a:rPr>
-              <a:t>1 / 24</a:t>
+              <a:t>1 / 25</a:t>
             </a:r>
           </a:p>
         </p:txBody>
@@ -6604,7 +6700,7 @@
                 </a:solidFill>
                 <a:latin typeface="Calibri"/>
               </a:rPr>
-              <a:t>Week 3, Build 1: the presentation</a:t>
+              <a:t>Your answer, in front of the panel</a:t>
             </a:r>
           </a:p>
         </p:txBody>
@@ -6639,7 +6735,7 @@
                 </a:solidFill>
                 <a:latin typeface="Calibri"/>
               </a:rPr>
-              <a:t>10 / 24</a:t>
+              <a:t>10 / 25</a:t>
             </a:r>
           </a:p>
         </p:txBody>
@@ -7703,7 +7799,7 @@
                 </a:solidFill>
                 <a:latin typeface="Calibri"/>
               </a:rPr>
-              <a:t>S7  ·  11 / 24</a:t>
+              <a:t>S7  ·  11 / 25</a:t>
             </a:r>
           </a:p>
         </p:txBody>
@@ -8842,7 +8938,7 @@
                 </a:solidFill>
                 <a:latin typeface="Calibri"/>
               </a:rPr>
-              <a:t>S8  ·  12 / 24</a:t>
+              <a:t>S8  ·  12 / 25</a:t>
             </a:r>
           </a:p>
         </p:txBody>
@@ -9793,7 +9889,7 @@
                 </a:solidFill>
                 <a:latin typeface="Calibri"/>
               </a:rPr>
-              <a:t>S9  ·  13 / 24</a:t>
+              <a:t>S9  ·  13 / 25</a:t>
             </a:r>
           </a:p>
         </p:txBody>
@@ -10811,7 +10907,7 @@
                 </a:solidFill>
                 <a:latin typeface="Calibri"/>
               </a:rPr>
-              <a:t>S10  ·  14 / 24</a:t>
+              <a:t>S10  ·  14 / 25</a:t>
             </a:r>
           </a:p>
         </p:txBody>
@@ -11087,7 +11183,7 @@
                 </a:solidFill>
                 <a:latin typeface="Calibri"/>
               </a:rPr>
-              <a:t>Cold, from the raw files, in one run: the number on your one-slide answer, reproduced in front of the panel.</a:t>
+              <a:t>Cold, from the raw files, in one run with two minutes to recover: the number on your one-slide answer, reproduced in front of the panel.</a:t>
             </a:r>
           </a:p>
         </p:txBody>
@@ -11397,7 +11493,7 @@
                 </a:solidFill>
                 <a:latin typeface="Calibri"/>
               </a:rPr>
-              <a:t>Week 3, Build 1: the presentation</a:t>
+              <a:t>Your answer, in front of the panel</a:t>
             </a:r>
           </a:p>
         </p:txBody>
@@ -11432,7 +11528,7 @@
                 </a:solidFill>
                 <a:latin typeface="Calibri"/>
               </a:rPr>
-              <a:t>15 / 24</a:t>
+              <a:t>15 / 25</a:t>
             </a:r>
           </a:p>
         </p:txBody>
@@ -12339,7 +12435,7 @@
         <p:spPr>
           <a:xfrm>
             <a:off x="4380890" y="3029204"/>
-            <a:ext cx="1239469" cy="1126236"/>
+            <a:ext cx="1239469" cy="1307846"/>
           </a:xfrm>
           <a:prstGeom prst="rect">
             <a:avLst/>
@@ -12360,7 +12456,7 @@
                 </a:solidFill>
                 <a:latin typeface="Calibri"/>
               </a:rPr>
-              <a:t>One press, top to bottom. If it breaks, say in one sentence what broke and why, then go to questions.</a:t>
+              <a:t>One press, top to bottom. If it fails, you have two minutes to recover it live, as you would with a client.</a:t>
             </a:r>
           </a:p>
         </p:txBody>
@@ -12951,7 +13047,7 @@
                 </a:solidFill>
                 <a:latin typeface="Calibri"/>
               </a:rPr>
-              <a:t>S11  ·  16 / 24</a:t>
+              <a:t>S11  ·  16 / 25</a:t>
             </a:r>
           </a:p>
         </p:txBody>
@@ -13192,7 +13288,7 @@
                 </a:solidFill>
                 <a:latin typeface="Calibri"/>
               </a:rPr>
-              <a:t>Four groups describe their demo plan.</a:t>
+              <a:t>Four groups say what they will do if a cell fails on the cold run.</a:t>
             </a:r>
           </a:p>
         </p:txBody>
@@ -13329,7 +13425,7 @@
                 </a:solidFill>
                 <a:latin typeface="Calibri"/>
               </a:rPr>
-              <a:t>Which plan meets all three rules? Answer as a letter.</a:t>
+              <a:t>Which plan meets the demo rules? Answer as a letter.</a:t>
             </a:r>
           </a:p>
         </p:txBody>
@@ -13344,7 +13440,7 @@
         </p:nvGraphicFramePr>
         <p:xfrm>
           <a:off x="530352" y="2662428"/>
-          <a:ext cx="11130991" cy="2332736"/>
+          <a:ext cx="11130991" cy="1849120"/>
         </p:xfrm>
         <a:graphic>
           <a:graphicData uri="http://schemas.openxmlformats.org/drawingml/2006/table">
@@ -13427,7 +13523,7 @@
                           </a:solidFill>
                           <a:latin typeface="Calibri"/>
                         </a:rPr>
-                        <a:t>Open the notebook as it was saved on Friday night, scroll through the outputs and explain each chart.</a:t>
+                        <a:t>Skip the recovery and open the notebook as saved on Friday night, scrolling through its charts.</a:t>
                       </a:r>
                     </a:p>
                   </a:txBody>
@@ -13473,7 +13569,7 @@
                           </a:solidFill>
                           <a:latin typeface="Calibri"/>
                         </a:rPr>
-                        <a:t>Run a cleaned extract the group saved on Thursday, because the raw files take a minute to load.</a:t>
+                        <a:t>Switch to a cleaned extract the group saved on Thursday, since the raw files are what broke.</a:t>
                       </a:r>
                     </a:p>
                   </a:txBody>
@@ -13484,7 +13580,7 @@
                   </a:tcPr>
                 </a:tc>
               </a:tr>
-              <a:tr h="611632">
+              <a:tr h="369824">
                 <a:tc>
                   <a:txBody>
                     <a:bodyPr/>
@@ -13519,7 +13615,7 @@
                           </a:solidFill>
                           <a:latin typeface="Calibri"/>
                         </a:rPr>
-                        <a:t>Restart the kernel, run every cell once on the files in the data folder, and read the claim's number off the last cell.</a:t>
+                        <a:t>Keep debugging live for as long as it takes, so the panel sees every output in the end.</a:t>
                       </a:r>
                     </a:p>
                   </a:txBody>
@@ -13530,7 +13626,7 @@
                   </a:tcPr>
                 </a:tc>
               </a:tr>
-              <a:tr h="611632">
+              <a:tr h="369824">
                 <a:tc>
                   <a:txBody>
                     <a:bodyPr/>
@@ -13565,7 +13661,7 @@
                           </a:solidFill>
                           <a:latin typeface="Calibri"/>
                         </a:rPr>
-                        <a:t>Run it cold, and if one cell fails, fix that cell live and run the whole notebook again from the top so the panel sees every output.</a:t>
+                        <a:t>Fix the cell live inside two minutes; if it still fails, present from the executed notebook.</a:t>
                       </a:r>
                     </a:p>
                   </a:txBody>
@@ -14005,7 +14101,7 @@
                 </a:solidFill>
                 <a:latin typeface="Calibri"/>
               </a:rPr>
-              <a:t>S12  ·  17 / 24</a:t>
+              <a:t>S12  ·  17 / 25</a:t>
             </a:r>
           </a:p>
         </p:txBody>
@@ -14211,7 +14307,7 @@
                 </a:solidFill>
                 <a:latin typeface="Georgia"/>
               </a:rPr>
-              <a:t>Answer: c, and only c</a:t>
+              <a:t>Answer: d, a live fix inside two minutes</a:t>
             </a:r>
           </a:p>
         </p:txBody>
@@ -14246,7 +14342,7 @@
                 </a:solidFill>
                 <a:latin typeface="Calibri"/>
               </a:rPr>
-              <a:t>Each of the other three breaks one rule.</a:t>
+              <a:t>A client gives you two minutes to recover, and never an open-ended debugging session.</a:t>
             </a:r>
           </a:p>
         </p:txBody>
@@ -14354,7 +14450,7 @@
                           </a:solidFill>
                           <a:latin typeface="Calibri"/>
                         </a:rPr>
-                        <a:t>Cold: saved outputs are from an earlier run, so nothing ran in front of the panel</a:t>
+                        <a:t>Gives up the two minutes a client would allow, and shows outputs nothing ran in front of the panel</a:t>
                       </a:r>
                     </a:p>
                   </a:txBody>
@@ -14400,7 +14496,7 @@
                           </a:solidFill>
                           <a:latin typeface="Calibri"/>
                         </a:rPr>
-                        <a:t>Raw files: the extract hides every cleaning decision the panel wants to see made</a:t>
+                        <a:t>Breaks the raw files rule: the extract hides every cleaning decision the panel wants to see made</a:t>
                       </a:r>
                     </a:p>
                   </a:txBody>
@@ -14446,7 +14542,7 @@
                           </a:solidFill>
                           <a:latin typeface="Calibri"/>
                         </a:rPr>
-                        <a:t>Meets all three: cold, raw and once</a:t>
+                        <a:t>Breaks the two-minute limit: open-ended debugging eats the slot and the panel's questions</a:t>
                       </a:r>
                     </a:p>
                   </a:txBody>
@@ -14492,7 +14588,7 @@
                           </a:solidFill>
                           <a:latin typeface="Calibri"/>
                         </a:rPr>
-                        <a:t>One run: a live fix and a second run turn the demo into debugging</a:t>
+                        <a:t>Holds: two minutes to recover live, then the executed notebook, and the analysis keeps its marks</a:t>
                       </a:r>
                     </a:p>
                   </a:txBody>
@@ -14932,7 +15028,7 @@
                 </a:solidFill>
                 <a:latin typeface="Calibri"/>
               </a:rPr>
-              <a:t>S13  ·  18 / 24</a:t>
+              <a:t>S13  ·  18 / 25</a:t>
             </a:r>
           </a:p>
         </p:txBody>
@@ -15518,7 +15614,7 @@
                 </a:solidFill>
                 <a:latin typeface="Calibri"/>
               </a:rPr>
-              <a:t>Week 3, Build 1: the presentation</a:t>
+              <a:t>Your answer, in front of the panel</a:t>
             </a:r>
           </a:p>
         </p:txBody>
@@ -15553,7 +15649,7 @@
                 </a:solidFill>
                 <a:latin typeface="Calibri"/>
               </a:rPr>
-              <a:t>19 / 24</a:t>
+              <a:t>19 / 25</a:t>
             </a:r>
           </a:p>
         </p:txBody>
@@ -16139,7 +16235,7 @@
                 </a:solidFill>
                 <a:latin typeface="Calibri"/>
               </a:rPr>
-              <a:t>Week 3, Build 1: the presentation</a:t>
+              <a:t>Your answer, in front of the panel</a:t>
             </a:r>
           </a:p>
         </p:txBody>
@@ -16174,7 +16270,7 @@
                 </a:solidFill>
                 <a:latin typeface="Calibri"/>
               </a:rPr>
-              <a:t>2 / 24</a:t>
+              <a:t>2 / 25</a:t>
             </a:r>
           </a:p>
         </p:txBody>
@@ -17338,7 +17434,7 @@
                 </a:solidFill>
                 <a:latin typeface="Calibri"/>
               </a:rPr>
-              <a:t>S14  ·  20 / 24</a:t>
+              <a:t>S14  ·  20 / 25</a:t>
             </a:r>
           </a:p>
         </p:txBody>
@@ -18224,7 +18320,7 @@
                 </a:solidFill>
                 <a:latin typeface="Calibri"/>
               </a:rPr>
-              <a:t>S15  ·  21 / 24</a:t>
+              <a:t>S15  ·  21 / 25</a:t>
             </a:r>
           </a:p>
         </p:txBody>
@@ -19278,7 +19374,7 @@
                 </a:solidFill>
                 <a:latin typeface="Calibri"/>
               </a:rPr>
-              <a:t>S16  ·  22 / 24</a:t>
+              <a:t>S16  ·  22 / 25</a:t>
             </a:r>
           </a:p>
         </p:txBody>
@@ -20396,7 +20492,7 @@
                 </a:solidFill>
                 <a:latin typeface="Calibri"/>
               </a:rPr>
-              <a:t>S17  ·  23 / 24</a:t>
+              <a:t>S17  ·  23 / 25</a:t>
             </a:r>
           </a:p>
         </p:txBody>
@@ -21560,7 +21656,1250 @@
                 </a:solidFill>
                 <a:latin typeface="Calibri"/>
               </a:rPr>
-              <a:t>S18  ·  24 / 24</a:t>
+              <a:t>S18  ·  24 / 25</a:t>
+            </a:r>
+          </a:p>
+        </p:txBody>
+      </p:sp>
+    </p:spTree>
+  </p:cSld>
+  <p:clrMapOvr>
+    <a:masterClrMapping/>
+  </p:clrMapOvr>
+</p:sld>
+</file>
+
+<file path=ppt/slides/slide25.xml><?xml version="1.0" encoding="utf-8"?>
+<p:sld xmlns:a="http://schemas.openxmlformats.org/drawingml/2006/main" xmlns:p="http://schemas.openxmlformats.org/presentationml/2006/main" xmlns:r="http://schemas.openxmlformats.org/officeDocument/2006/relationships">
+  <p:cSld>
+    <p:spTree>
+      <p:nvGrpSpPr>
+        <p:cNvPr id="1" name=""/>
+        <p:cNvGrpSpPr/>
+        <p:nvPr/>
+      </p:nvGrpSpPr>
+      <p:grpSpPr/>
+      <p:pic>
+        <p:nvPicPr>
+          <p:cNvPr id="2" name="Picture 1" descr="bg_light.jpg"/>
+          <p:cNvPicPr>
+            <a:picLocks noChangeAspect="1"/>
+          </p:cNvPicPr>
+          <p:nvPr/>
+        </p:nvPicPr>
+        <p:blipFill>
+          <a:blip r:embed="rId2"/>
+          <a:stretch>
+            <a:fillRect/>
+          </a:stretch>
+        </p:blipFill>
+        <p:spPr>
+          <a:xfrm>
+            <a:off x="0" y="0"/>
+            <a:ext cx="12191695" cy="6858000"/>
+          </a:xfrm>
+          <a:prstGeom prst="rect">
+            <a:avLst/>
+          </a:prstGeom>
+        </p:spPr>
+      </p:pic>
+      <p:pic>
+        <p:nvPicPr>
+          <p:cNvPr id="3" name="Picture 2" descr="iitgn_logo.png"/>
+          <p:cNvPicPr>
+            <a:picLocks noChangeAspect="1"/>
+          </p:cNvPicPr>
+          <p:nvPr/>
+        </p:nvPicPr>
+        <p:blipFill>
+          <a:blip r:embed="rId3"/>
+          <a:stretch>
+            <a:fillRect/>
+          </a:stretch>
+        </p:blipFill>
+        <p:spPr>
+          <a:xfrm>
+            <a:off x="530352" y="201168"/>
+            <a:ext cx="420624" cy="420624"/>
+          </a:xfrm>
+          <a:prstGeom prst="rect">
+            <a:avLst/>
+          </a:prstGeom>
+        </p:spPr>
+      </p:pic>
+      <p:sp>
+        <p:nvSpPr>
+          <p:cNvPr id="4" name="TextBox 3"/>
+          <p:cNvSpPr txBox="1"/>
+          <p:nvPr/>
+        </p:nvSpPr>
+        <p:spPr>
+          <a:xfrm>
+            <a:off x="1042416" y="228600"/>
+            <a:ext cx="5120640" cy="185166"/>
+          </a:xfrm>
+          <a:prstGeom prst="rect">
+            <a:avLst/>
+          </a:prstGeom>
+          <a:noFill/>
+        </p:spPr>
+        <p:txBody>
+          <a:bodyPr wrap="square" anchor="t" lIns="0" rIns="0" tIns="0" bIns="0">
+            <a:spAutoFit/>
+          </a:bodyPr>
+          <a:lstStyle/>
+          <a:p>
+            <a:pPr algn="l"/>
+            <a:r>
+              <a:rPr sz="900" b="1" i="0">
+                <a:solidFill>
+                  <a:srgbClr val="1A0F5C"/>
+                </a:solidFill>
+                <a:latin typeface="Calibri"/>
+              </a:rPr>
+              <a:t>Indian Institute of Technology Gandhinagar</a:t>
+            </a:r>
+          </a:p>
+        </p:txBody>
+      </p:sp>
+      <p:sp>
+        <p:nvSpPr>
+          <p:cNvPr id="5" name="TextBox 4"/>
+          <p:cNvSpPr txBox="1"/>
+          <p:nvPr/>
+        </p:nvSpPr>
+        <p:spPr>
+          <a:xfrm>
+            <a:off x="1042416" y="420623"/>
+            <a:ext cx="5852160" cy="127381"/>
+          </a:xfrm>
+          <a:prstGeom prst="rect">
+            <a:avLst/>
+          </a:prstGeom>
+          <a:noFill/>
+        </p:spPr>
+        <p:txBody>
+          <a:bodyPr wrap="square" anchor="t" lIns="0" rIns="0" tIns="0" bIns="0">
+            <a:spAutoFit/>
+          </a:bodyPr>
+          <a:lstStyle/>
+          <a:p>
+            <a:pPr algn="l"/>
+            <a:r>
+              <a:rPr sz="550" b="1" i="0" spc="300">
+                <a:solidFill>
+                  <a:srgbClr val="6B6690"/>
+                </a:solidFill>
+                <a:latin typeface="Calibri"/>
+              </a:rPr>
+              <a:t>ADMINISTERED THROUGH THE COMPETENCY ADVANCEMENT ACADEMY</a:t>
+            </a:r>
+          </a:p>
+        </p:txBody>
+      </p:sp>
+      <p:sp>
+        <p:nvSpPr>
+          <p:cNvPr id="6" name="TextBox 5"/>
+          <p:cNvSpPr txBox="1"/>
+          <p:nvPr/>
+        </p:nvSpPr>
+        <p:spPr>
+          <a:xfrm>
+            <a:off x="5992063" y="310896"/>
+            <a:ext cx="5669280" cy="127381"/>
+          </a:xfrm>
+          <a:prstGeom prst="rect">
+            <a:avLst/>
+          </a:prstGeom>
+          <a:noFill/>
+        </p:spPr>
+        <p:txBody>
+          <a:bodyPr wrap="square" anchor="t" lIns="0" rIns="0" tIns="0" bIns="0">
+            <a:spAutoFit/>
+          </a:bodyPr>
+          <a:lstStyle/>
+          <a:p>
+            <a:pPr algn="r"/>
+            <a:r>
+              <a:rPr sz="550" b="1" i="0" spc="300">
+                <a:solidFill>
+                  <a:srgbClr val="6B6690"/>
+                </a:solidFill>
+                <a:latin typeface="Calibri"/>
+              </a:rPr>
+              <a:t>PG DIPLOMA IN AI-ML AND AGENTIC AI ENGINEERING  ·  COHORT 2</a:t>
+            </a:r>
+          </a:p>
+        </p:txBody>
+      </p:sp>
+      <p:sp>
+        <p:nvSpPr>
+          <p:cNvPr id="7" name="TextBox 6"/>
+          <p:cNvSpPr txBox="1"/>
+          <p:nvPr/>
+        </p:nvSpPr>
+        <p:spPr>
+          <a:xfrm>
+            <a:off x="530352" y="676656"/>
+            <a:ext cx="11130991" cy="512064"/>
+          </a:xfrm>
+          <a:prstGeom prst="rect">
+            <a:avLst/>
+          </a:prstGeom>
+          <a:noFill/>
+        </p:spPr>
+        <p:txBody>
+          <a:bodyPr wrap="square" anchor="b" lIns="0" rIns="0" tIns="0" bIns="0">
+            <a:spAutoFit/>
+          </a:bodyPr>
+          <a:lstStyle/>
+          <a:p>
+            <a:pPr algn="l"/>
+            <a:r>
+              <a:rPr sz="2600" b="0" i="0">
+                <a:solidFill>
+                  <a:srgbClr val="1A0F5C"/>
+                </a:solidFill>
+                <a:latin typeface="Georgia"/>
+              </a:rPr>
+              <a:t>How the mini project is scored</a:t>
+            </a:r>
+          </a:p>
+        </p:txBody>
+      </p:sp>
+      <p:sp>
+        <p:nvSpPr>
+          <p:cNvPr id="8" name="TextBox 7"/>
+          <p:cNvSpPr txBox="1"/>
+          <p:nvPr/>
+        </p:nvSpPr>
+        <p:spPr>
+          <a:xfrm>
+            <a:off x="530352" y="1243584"/>
+            <a:ext cx="11130991" cy="234696"/>
+          </a:xfrm>
+          <a:prstGeom prst="rect">
+            <a:avLst/>
+          </a:prstGeom>
+          <a:noFill/>
+        </p:spPr>
+        <p:txBody>
+          <a:bodyPr wrap="square" anchor="t" lIns="0" rIns="0" tIns="0" bIns="0">
+            <a:spAutoFit/>
+          </a:bodyPr>
+          <a:lstStyle/>
+          <a:p>
+            <a:pPr algn="l"/>
+            <a:r>
+              <a:rPr sz="1200" b="0" i="0">
+                <a:solidFill>
+                  <a:srgbClr val="6B6690"/>
+                </a:solidFill>
+                <a:latin typeface="Calibri"/>
+              </a:rPr>
+              <a:t>The approved rubric: 34 marks for the group's work and 6 for each learner's presentation and defence.</a:t>
+            </a:r>
+          </a:p>
+        </p:txBody>
+      </p:sp>
+      <p:sp>
+        <p:nvSpPr>
+          <p:cNvPr id="9" name="Rounded Rectangle 8"/>
+          <p:cNvSpPr/>
+          <p:nvPr/>
+        </p:nvSpPr>
+        <p:spPr>
+          <a:xfrm>
+            <a:off x="530352" y="1956816"/>
+            <a:ext cx="11130991" cy="736600"/>
+          </a:xfrm>
+          <a:prstGeom prst="roundRect">
+            <a:avLst>
+              <a:gd name="adj" fmla="val 8000"/>
+            </a:avLst>
+          </a:prstGeom>
+          <a:solidFill>
+            <a:srgbClr val="F7F5FD"/>
+          </a:solidFill>
+          <a:ln w="9525">
+            <a:solidFill>
+              <a:srgbClr val="E4E1F1"/>
+            </a:solidFill>
+          </a:ln>
+          <a:effectLst/>
+        </p:spPr>
+        <p:style>
+          <a:lnRef idx="1">
+            <a:schemeClr val="accent1"/>
+          </a:lnRef>
+          <a:fillRef idx="3">
+            <a:schemeClr val="accent1"/>
+          </a:fillRef>
+          <a:effectRef idx="2">
+            <a:schemeClr val="accent1"/>
+          </a:effectRef>
+          <a:fontRef idx="minor">
+            <a:schemeClr val="lt1"/>
+          </a:fontRef>
+        </p:style>
+        <p:txBody>
+          <a:bodyPr rtlCol="0" anchor="ctr" wrap="square"/>
+          <a:lstStyle/>
+          <a:p>
+            <a:pPr algn="ctr"/>
+          </a:p>
+        </p:txBody>
+      </p:sp>
+      <p:sp>
+        <p:nvSpPr>
+          <p:cNvPr id="10" name="Rounded Rectangle 9"/>
+          <p:cNvSpPr/>
+          <p:nvPr/>
+        </p:nvSpPr>
+        <p:spPr>
+          <a:xfrm>
+            <a:off x="676656" y="2084832"/>
+            <a:ext cx="45720" cy="480568"/>
+          </a:xfrm>
+          <a:prstGeom prst="roundRect">
+            <a:avLst>
+              <a:gd name="adj" fmla="val 50000"/>
+            </a:avLst>
+          </a:prstGeom>
+          <a:solidFill>
+            <a:srgbClr val="5B3FD6"/>
+          </a:solidFill>
+          <a:ln>
+            <a:noFill/>
+          </a:ln>
+          <a:effectLst/>
+        </p:spPr>
+        <p:style>
+          <a:lnRef idx="1">
+            <a:schemeClr val="accent1"/>
+          </a:lnRef>
+          <a:fillRef idx="3">
+            <a:schemeClr val="accent1"/>
+          </a:fillRef>
+          <a:effectRef idx="2">
+            <a:schemeClr val="accent1"/>
+          </a:effectRef>
+          <a:fontRef idx="minor">
+            <a:schemeClr val="lt1"/>
+          </a:fontRef>
+        </p:style>
+        <p:txBody>
+          <a:bodyPr rtlCol="0" anchor="ctr" wrap="square"/>
+          <a:lstStyle/>
+          <a:p>
+            <a:pPr algn="ctr"/>
+          </a:p>
+        </p:txBody>
+      </p:sp>
+      <p:sp>
+        <p:nvSpPr>
+          <p:cNvPr id="11" name="TextBox 10"/>
+          <p:cNvSpPr txBox="1"/>
+          <p:nvPr/>
+        </p:nvSpPr>
+        <p:spPr>
+          <a:xfrm>
+            <a:off x="877824" y="2075688"/>
+            <a:ext cx="10564063" cy="553720"/>
+          </a:xfrm>
+          <a:prstGeom prst="rect">
+            <a:avLst/>
+          </a:prstGeom>
+          <a:noFill/>
+        </p:spPr>
+        <p:txBody>
+          <a:bodyPr wrap="square" anchor="ctr" lIns="0" rIns="0" tIns="0" bIns="0">
+            <a:spAutoFit/>
+          </a:bodyPr>
+          <a:lstStyle/>
+          <a:p>
+            <a:r>
+              <a:rPr sz="1300" b="1">
+                <a:solidFill>
+                  <a:srgbClr val="5B3FD6"/>
+                </a:solidFill>
+                <a:latin typeface="Calibri"/>
+              </a:rPr>
+              <a:t>Mini project, 40 marks. </a:t>
+            </a:r>
+            <a:r>
+              <a:rPr sz="1300" b="0" i="0">
+                <a:solidFill>
+                  <a:srgbClr val="1A1440"/>
+                </a:solidFill>
+                <a:latin typeface="Calibri"/>
+              </a:rPr>
+              <a:t>The first four criteria are scored once for the group, and every member receives those 34 marks; presentation and defence is scored for each learner on 6 marks, so a silent teammate cannot ride the group's score.</a:t>
+            </a:r>
+          </a:p>
+        </p:txBody>
+      </p:sp>
+      <p:graphicFrame>
+        <p:nvGraphicFramePr>
+          <p:cNvPr id="12" name="Table 11"/>
+          <p:cNvGraphicFramePr>
+            <a:graphicFrameLocks noGrp="1"/>
+          </p:cNvGraphicFramePr>
+          <p:nvPr/>
+        </p:nvGraphicFramePr>
+        <p:xfrm>
+          <a:off x="530352" y="2858008"/>
+          <a:ext cx="11130990" cy="2840736"/>
+        </p:xfrm>
+        <a:graphic>
+          <a:graphicData uri="http://schemas.openxmlformats.org/drawingml/2006/table">
+            <a:tbl>
+              <a:tblPr firstRow="0" bandRow="0">
+                <a:tableStyleId>{2D5ABB26-0587-4C30-8999-92F81FD0307C}</a:tableStyleId>
+              </a:tblPr>
+              <a:tblGrid>
+                <a:gridCol w="2886034"/>
+                <a:gridCol w="914400"/>
+                <a:gridCol w="7330556"/>
+              </a:tblGrid>
+              <a:tr h="335280">
+                <a:tc>
+                  <a:txBody>
+                    <a:bodyPr/>
+                    <a:lstStyle/>
+                    <a:p>
+                      <a:r>
+                        <a:rPr sz="1250" b="1" i="0">
+                          <a:solidFill>
+                            <a:srgbClr val="FFFFFF"/>
+                          </a:solidFill>
+                          <a:latin typeface="Calibri"/>
+                        </a:rPr>
+                        <a:t>Criterion</a:t>
+                      </a:r>
+                    </a:p>
+                  </a:txBody>
+                  <a:tcPr marL="101600" marR="101600" marT="38100" marB="38100" anchor="ctr">
+                    <a:solidFill>
+                      <a:srgbClr val="1A0F5C"/>
+                    </a:solidFill>
+                  </a:tcPr>
+                </a:tc>
+                <a:tc>
+                  <a:txBody>
+                    <a:bodyPr/>
+                    <a:lstStyle/>
+                    <a:p>
+                      <a:r>
+                        <a:rPr sz="1250" b="1" i="0">
+                          <a:solidFill>
+                            <a:srgbClr val="FFFFFF"/>
+                          </a:solidFill>
+                          <a:latin typeface="Calibri"/>
+                        </a:rPr>
+                        <a:t>Marks</a:t>
+                      </a:r>
+                    </a:p>
+                  </a:txBody>
+                  <a:tcPr marL="101600" marR="101600" marT="38100" marB="38100" anchor="ctr">
+                    <a:solidFill>
+                      <a:srgbClr val="1A0F5C"/>
+                    </a:solidFill>
+                  </a:tcPr>
+                </a:tc>
+                <a:tc>
+                  <a:txBody>
+                    <a:bodyPr/>
+                    <a:lstStyle/>
+                    <a:p>
+                      <a:r>
+                        <a:rPr sz="1250" b="1" i="0">
+                          <a:solidFill>
+                            <a:srgbClr val="FFFFFF"/>
+                          </a:solidFill>
+                          <a:latin typeface="Calibri"/>
+                        </a:rPr>
+                        <a:t>What full marks look like</a:t>
+                      </a:r>
+                    </a:p>
+                  </a:txBody>
+                  <a:tcPr marL="101600" marR="101600" marT="38100" marB="38100" anchor="ctr">
+                    <a:solidFill>
+                      <a:srgbClr val="1A0F5C"/>
+                    </a:solidFill>
+                  </a:tcPr>
+                </a:tc>
+              </a:tr>
+              <a:tr h="542544">
+                <a:tc>
+                  <a:txBody>
+                    <a:bodyPr/>
+                    <a:lstStyle/>
+                    <a:p>
+                      <a:r>
+                        <a:rPr sz="1200" b="0" i="0">
+                          <a:solidFill>
+                            <a:srgbClr val="1A1440"/>
+                          </a:solidFill>
+                          <a:latin typeface="Calibri"/>
+                        </a:rPr>
+                        <a:t>The question translated</a:t>
+                      </a:r>
+                    </a:p>
+                  </a:txBody>
+                  <a:tcPr marL="101600" marR="101600" marT="38100" marB="38100" anchor="ctr">
+                    <a:solidFill>
+                      <a:srgbClr val="FFFFFF"/>
+                    </a:solidFill>
+                  </a:tcPr>
+                </a:tc>
+                <a:tc>
+                  <a:txBody>
+                    <a:bodyPr/>
+                    <a:lstStyle/>
+                    <a:p>
+                      <a:r>
+                        <a:rPr sz="1200" b="0" i="0">
+                          <a:solidFill>
+                            <a:srgbClr val="1A1440"/>
+                          </a:solidFill>
+                          <a:latin typeface="Calibri"/>
+                        </a:rPr>
+                        <a:t>8</a:t>
+                      </a:r>
+                    </a:p>
+                  </a:txBody>
+                  <a:tcPr marL="101600" marR="101600" marT="38100" marB="38100" anchor="ctr">
+                    <a:solidFill>
+                      <a:srgbClr val="FFFFFF"/>
+                    </a:solidFill>
+                  </a:tcPr>
+                </a:tc>
+                <a:tc>
+                  <a:txBody>
+                    <a:bodyPr/>
+                    <a:lstStyle/>
+                    <a:p>
+                      <a:r>
+                        <a:rPr sz="1200" b="0" i="0">
+                          <a:solidFill>
+                            <a:srgbClr val="1A1440"/>
+                          </a:solidFill>
+                          <a:latin typeface="Calibri"/>
+                        </a:rPr>
+                        <a:t>Dr Menon's words are mapped to the right Weeks 1 and 2 method, with the metric defined and the decision it feeds named.</a:t>
+                      </a:r>
+                    </a:p>
+                  </a:txBody>
+                  <a:tcPr marL="101600" marR="101600" marT="38100" marB="38100" anchor="ctr">
+                    <a:solidFill>
+                      <a:srgbClr val="FFFFFF"/>
+                    </a:solidFill>
+                  </a:tcPr>
+                </a:tc>
+              </a:tr>
+              <a:tr h="542544">
+                <a:tc>
+                  <a:txBody>
+                    <a:bodyPr/>
+                    <a:lstStyle/>
+                    <a:p>
+                      <a:r>
+                        <a:rPr sz="1200" b="0" i="0">
+                          <a:solidFill>
+                            <a:srgbClr val="1A1440"/>
+                          </a:solidFill>
+                          <a:latin typeface="Calibri"/>
+                        </a:rPr>
+                        <a:t>The data made trustworthy</a:t>
+                      </a:r>
+                    </a:p>
+                  </a:txBody>
+                  <a:tcPr marL="101600" marR="101600" marT="38100" marB="38100" anchor="ctr">
+                    <a:solidFill>
+                      <a:srgbClr val="F4F2FA"/>
+                    </a:solidFill>
+                  </a:tcPr>
+                </a:tc>
+                <a:tc>
+                  <a:txBody>
+                    <a:bodyPr/>
+                    <a:lstStyle/>
+                    <a:p>
+                      <a:r>
+                        <a:rPr sz="1200" b="0" i="0">
+                          <a:solidFill>
+                            <a:srgbClr val="1A1440"/>
+                          </a:solidFill>
+                          <a:latin typeface="Calibri"/>
+                        </a:rPr>
+                        <a:t>10</a:t>
+                      </a:r>
+                    </a:p>
+                  </a:txBody>
+                  <a:tcPr marL="101600" marR="101600" marT="38100" marB="38100" anchor="ctr">
+                    <a:solidFill>
+                      <a:srgbClr val="F4F2FA"/>
+                    </a:solidFill>
+                  </a:tcPr>
+                </a:tc>
+                <a:tc>
+                  <a:txBody>
+                    <a:bodyPr/>
+                    <a:lstStyle/>
+                    <a:p>
+                      <a:r>
+                        <a:rPr sz="1200" b="0" i="0">
+                          <a:solidFill>
+                            <a:srgbClr val="1A1440"/>
+                          </a:solidFill>
+                          <a:latin typeface="Calibri"/>
+                        </a:rPr>
+                        <a:t>The data is profiled before it is touched, every cleaning call is in the decisions log with its reason, and counts and rupees reconcile across files.</a:t>
+                      </a:r>
+                    </a:p>
+                  </a:txBody>
+                  <a:tcPr marL="101600" marR="101600" marT="38100" marB="38100" anchor="ctr">
+                    <a:solidFill>
+                      <a:srgbClr val="F4F2FA"/>
+                    </a:solidFill>
+                  </a:tcPr>
+                </a:tc>
+              </a:tr>
+              <a:tr h="542544">
+                <a:tc>
+                  <a:txBody>
+                    <a:bodyPr/>
+                    <a:lstStyle/>
+                    <a:p>
+                      <a:r>
+                        <a:rPr sz="1200" b="0" i="0">
+                          <a:solidFill>
+                            <a:srgbClr val="1A1440"/>
+                          </a:solidFill>
+                          <a:latin typeface="Calibri"/>
+                        </a:rPr>
+                        <a:t>The analysis</a:t>
+                      </a:r>
+                    </a:p>
+                  </a:txBody>
+                  <a:tcPr marL="101600" marR="101600" marT="38100" marB="38100" anchor="ctr">
+                    <a:solidFill>
+                      <a:srgbClr val="FFFFFF"/>
+                    </a:solidFill>
+                  </a:tcPr>
+                </a:tc>
+                <a:tc>
+                  <a:txBody>
+                    <a:bodyPr/>
+                    <a:lstStyle/>
+                    <a:p>
+                      <a:r>
+                        <a:rPr sz="1200" b="0" i="0">
+                          <a:solidFill>
+                            <a:srgbClr val="1A1440"/>
+                          </a:solidFill>
+                          <a:latin typeface="Calibri"/>
+                        </a:rPr>
+                        <a:t>10</a:t>
+                      </a:r>
+                    </a:p>
+                  </a:txBody>
+                  <a:tcPr marL="101600" marR="101600" marT="38100" marB="38100" anchor="ctr">
+                    <a:solidFill>
+                      <a:srgbClr val="FFFFFF"/>
+                    </a:solidFill>
+                  </a:tcPr>
+                </a:tc>
+                <a:tc>
+                  <a:txBody>
+                    <a:bodyPr/>
+                    <a:lstStyle/>
+                    <a:p>
+                      <a:r>
+                        <a:rPr sz="1200" b="0" i="0">
+                          <a:solidFill>
+                            <a:srgbClr val="1A1440"/>
+                          </a:solidFill>
+                          <a:latin typeface="Calibri"/>
+                        </a:rPr>
+                        <a:t>The tree, ladder or fair comparison reaches the branch that explains the symptom, on the right denominator, with a chance test where one is needed.</a:t>
+                      </a:r>
+                    </a:p>
+                  </a:txBody>
+                  <a:tcPr marL="101600" marR="101600" marT="38100" marB="38100" anchor="ctr">
+                    <a:solidFill>
+                      <a:srgbClr val="FFFFFF"/>
+                    </a:solidFill>
+                  </a:tcPr>
+                </a:tc>
+              </a:tr>
+              <a:tr h="542544">
+                <a:tc>
+                  <a:txBody>
+                    <a:bodyPr/>
+                    <a:lstStyle/>
+                    <a:p>
+                      <a:r>
+                        <a:rPr sz="1200" b="0" i="0">
+                          <a:solidFill>
+                            <a:srgbClr val="1A1440"/>
+                          </a:solidFill>
+                          <a:latin typeface="Calibri"/>
+                        </a:rPr>
+                        <a:t>The claim</a:t>
+                      </a:r>
+                    </a:p>
+                  </a:txBody>
+                  <a:tcPr marL="101600" marR="101600" marT="38100" marB="38100" anchor="ctr">
+                    <a:solidFill>
+                      <a:srgbClr val="F4F2FA"/>
+                    </a:solidFill>
+                  </a:tcPr>
+                </a:tc>
+                <a:tc>
+                  <a:txBody>
+                    <a:bodyPr/>
+                    <a:lstStyle/>
+                    <a:p>
+                      <a:r>
+                        <a:rPr sz="1200" b="0" i="0">
+                          <a:solidFill>
+                            <a:srgbClr val="1A1440"/>
+                          </a:solidFill>
+                          <a:latin typeface="Calibri"/>
+                        </a:rPr>
+                        <a:t>6</a:t>
+                      </a:r>
+                    </a:p>
+                  </a:txBody>
+                  <a:tcPr marL="101600" marR="101600" marT="38100" marB="38100" anchor="ctr">
+                    <a:solidFill>
+                      <a:srgbClr val="F4F2FA"/>
+                    </a:solidFill>
+                  </a:tcPr>
+                </a:tc>
+                <a:tc>
+                  <a:txBody>
+                    <a:bodyPr/>
+                    <a:lstStyle/>
+                    <a:p>
+                      <a:r>
+                        <a:rPr sz="1200" b="0" i="0">
+                          <a:solidFill>
+                            <a:srgbClr val="1A1440"/>
+                          </a:solidFill>
+                          <a:latin typeface="Calibri"/>
+                        </a:rPr>
+                        <a:t>One sentence carries its number, denominator, period and caveat, plus an action Dr Menon can take.</a:t>
+                      </a:r>
+                    </a:p>
+                  </a:txBody>
+                  <a:tcPr marL="101600" marR="101600" marT="38100" marB="38100" anchor="ctr">
+                    <a:solidFill>
+                      <a:srgbClr val="F4F2FA"/>
+                    </a:solidFill>
+                  </a:tcPr>
+                </a:tc>
+              </a:tr>
+              <a:tr h="335280">
+                <a:tc>
+                  <a:txBody>
+                    <a:bodyPr/>
+                    <a:lstStyle/>
+                    <a:p>
+                      <a:r>
+                        <a:rPr sz="1200" b="0" i="0">
+                          <a:solidFill>
+                            <a:srgbClr val="1A1440"/>
+                          </a:solidFill>
+                          <a:latin typeface="Calibri"/>
+                        </a:rPr>
+                        <a:t>Presentation and defence</a:t>
+                      </a:r>
+                    </a:p>
+                  </a:txBody>
+                  <a:tcPr marL="101600" marR="101600" marT="38100" marB="38100" anchor="ctr">
+                    <a:solidFill>
+                      <a:srgbClr val="FFFFFF"/>
+                    </a:solidFill>
+                  </a:tcPr>
+                </a:tc>
+                <a:tc>
+                  <a:txBody>
+                    <a:bodyPr/>
+                    <a:lstStyle/>
+                    <a:p>
+                      <a:r>
+                        <a:rPr sz="1200" b="0" i="0">
+                          <a:solidFill>
+                            <a:srgbClr val="1A1440"/>
+                          </a:solidFill>
+                          <a:latin typeface="Calibri"/>
+                        </a:rPr>
+                        <a:t>6</a:t>
+                      </a:r>
+                    </a:p>
+                  </a:txBody>
+                  <a:tcPr marL="101600" marR="101600" marT="38100" marB="38100" anchor="ctr">
+                    <a:solidFill>
+                      <a:srgbClr val="FFFFFF"/>
+                    </a:solidFill>
+                  </a:tcPr>
+                </a:tc>
+                <a:tc>
+                  <a:txBody>
+                    <a:bodyPr/>
+                    <a:lstStyle/>
+                    <a:p>
+                      <a:r>
+                        <a:rPr sz="1200" b="0" i="0">
+                          <a:solidFill>
+                            <a:srgbClr val="1A1440"/>
+                          </a:solidFill>
+                          <a:latin typeface="Calibri"/>
+                        </a:rPr>
+                        <a:t>The live demo runs cold, and every member answers a challenge on the caveat.</a:t>
+                      </a:r>
+                    </a:p>
+                  </a:txBody>
+                  <a:tcPr marL="101600" marR="101600" marT="38100" marB="38100" anchor="ctr">
+                    <a:solidFill>
+                      <a:srgbClr val="FFFFFF"/>
+                    </a:solidFill>
+                  </a:tcPr>
+                </a:tc>
+              </a:tr>
+            </a:tbl>
+          </a:graphicData>
+        </a:graphic>
+      </p:graphicFrame>
+      <p:sp>
+        <p:nvSpPr>
+          <p:cNvPr id="13" name="Oval 12"/>
+          <p:cNvSpPr/>
+          <p:nvPr/>
+        </p:nvSpPr>
+        <p:spPr>
+          <a:xfrm>
+            <a:off x="530352" y="6492240"/>
+            <a:ext cx="64008" cy="64008"/>
+          </a:xfrm>
+          <a:prstGeom prst="ellipse">
+            <a:avLst/>
+          </a:prstGeom>
+          <a:solidFill>
+            <a:srgbClr val="CFC9EE"/>
+          </a:solidFill>
+          <a:ln>
+            <a:noFill/>
+          </a:ln>
+          <a:effectLst/>
+        </p:spPr>
+        <p:style>
+          <a:lnRef idx="1">
+            <a:schemeClr val="accent1"/>
+          </a:lnRef>
+          <a:fillRef idx="3">
+            <a:schemeClr val="accent1"/>
+          </a:fillRef>
+          <a:effectRef idx="2">
+            <a:schemeClr val="accent1"/>
+          </a:effectRef>
+          <a:fontRef idx="minor">
+            <a:schemeClr val="lt1"/>
+          </a:fontRef>
+        </p:style>
+        <p:txBody>
+          <a:bodyPr rtlCol="0" anchor="ctr" wrap="square"/>
+          <a:lstStyle/>
+          <a:p>
+            <a:pPr algn="ctr"/>
+          </a:p>
+        </p:txBody>
+      </p:sp>
+      <p:sp>
+        <p:nvSpPr>
+          <p:cNvPr id="14" name="TextBox 13"/>
+          <p:cNvSpPr txBox="1"/>
+          <p:nvPr/>
+        </p:nvSpPr>
+        <p:spPr>
+          <a:xfrm>
+            <a:off x="640080" y="6437376"/>
+            <a:ext cx="1102423" cy="152146"/>
+          </a:xfrm>
+          <a:prstGeom prst="rect">
+            <a:avLst/>
+          </a:prstGeom>
+          <a:noFill/>
+        </p:spPr>
+        <p:txBody>
+          <a:bodyPr wrap="square" anchor="t" lIns="0" rIns="0" tIns="0" bIns="0">
+            <a:spAutoFit/>
+          </a:bodyPr>
+          <a:lstStyle/>
+          <a:p>
+            <a:pPr algn="l"/>
+            <a:r>
+              <a:rPr sz="700" b="0" i="0">
+                <a:solidFill>
+                  <a:srgbClr val="6B6690"/>
+                </a:solidFill>
+                <a:latin typeface="Calibri"/>
+              </a:rPr>
+              <a:t>The ask on the day</a:t>
+            </a:r>
+          </a:p>
+        </p:txBody>
+      </p:sp>
+      <p:sp>
+        <p:nvSpPr>
+          <p:cNvPr id="15" name="Oval 14"/>
+          <p:cNvSpPr/>
+          <p:nvPr/>
+        </p:nvSpPr>
+        <p:spPr>
+          <a:xfrm>
+            <a:off x="1833943" y="6492240"/>
+            <a:ext cx="64008" cy="64008"/>
+          </a:xfrm>
+          <a:prstGeom prst="ellipse">
+            <a:avLst/>
+          </a:prstGeom>
+          <a:solidFill>
+            <a:srgbClr val="CFC9EE"/>
+          </a:solidFill>
+          <a:ln>
+            <a:noFill/>
+          </a:ln>
+          <a:effectLst/>
+        </p:spPr>
+        <p:style>
+          <a:lnRef idx="1">
+            <a:schemeClr val="accent1"/>
+          </a:lnRef>
+          <a:fillRef idx="3">
+            <a:schemeClr val="accent1"/>
+          </a:fillRef>
+          <a:effectRef idx="2">
+            <a:schemeClr val="accent1"/>
+          </a:effectRef>
+          <a:fontRef idx="minor">
+            <a:schemeClr val="lt1"/>
+          </a:fontRef>
+        </p:style>
+        <p:txBody>
+          <a:bodyPr rtlCol="0" anchor="ctr" wrap="square"/>
+          <a:lstStyle/>
+          <a:p>
+            <a:pPr algn="ctr"/>
+          </a:p>
+        </p:txBody>
+      </p:sp>
+      <p:sp>
+        <p:nvSpPr>
+          <p:cNvPr id="16" name="TextBox 15"/>
+          <p:cNvSpPr txBox="1"/>
+          <p:nvPr/>
+        </p:nvSpPr>
+        <p:spPr>
+          <a:xfrm>
+            <a:off x="1943671" y="6437376"/>
+            <a:ext cx="1194435" cy="152146"/>
+          </a:xfrm>
+          <a:prstGeom prst="rect">
+            <a:avLst/>
+          </a:prstGeom>
+          <a:noFill/>
+        </p:spPr>
+        <p:txBody>
+          <a:bodyPr wrap="square" anchor="t" lIns="0" rIns="0" tIns="0" bIns="0">
+            <a:spAutoFit/>
+          </a:bodyPr>
+          <a:lstStyle/>
+          <a:p>
+            <a:pPr algn="l"/>
+            <a:r>
+              <a:rPr sz="700" b="0" i="0">
+                <a:solidFill>
+                  <a:srgbClr val="6B6690"/>
+                </a:solidFill>
+                <a:latin typeface="Calibri"/>
+              </a:rPr>
+              <a:t>The one-slide answer</a:t>
+            </a:r>
+          </a:p>
+        </p:txBody>
+      </p:sp>
+      <p:sp>
+        <p:nvSpPr>
+          <p:cNvPr id="17" name="Oval 16"/>
+          <p:cNvSpPr/>
+          <p:nvPr/>
+        </p:nvSpPr>
+        <p:spPr>
+          <a:xfrm>
+            <a:off x="3229546" y="6492240"/>
+            <a:ext cx="64008" cy="64008"/>
+          </a:xfrm>
+          <a:prstGeom prst="ellipse">
+            <a:avLst/>
+          </a:prstGeom>
+          <a:solidFill>
+            <a:srgbClr val="CFC9EE"/>
+          </a:solidFill>
+          <a:ln>
+            <a:noFill/>
+          </a:ln>
+          <a:effectLst/>
+        </p:spPr>
+        <p:style>
+          <a:lnRef idx="1">
+            <a:schemeClr val="accent1"/>
+          </a:lnRef>
+          <a:fillRef idx="3">
+            <a:schemeClr val="accent1"/>
+          </a:fillRef>
+          <a:effectRef idx="2">
+            <a:schemeClr val="accent1"/>
+          </a:effectRef>
+          <a:fontRef idx="minor">
+            <a:schemeClr val="lt1"/>
+          </a:fontRef>
+        </p:style>
+        <p:txBody>
+          <a:bodyPr rtlCol="0" anchor="ctr" wrap="square"/>
+          <a:lstStyle/>
+          <a:p>
+            <a:pPr algn="ctr"/>
+          </a:p>
+        </p:txBody>
+      </p:sp>
+      <p:sp>
+        <p:nvSpPr>
+          <p:cNvPr id="18" name="TextBox 17"/>
+          <p:cNvSpPr txBox="1"/>
+          <p:nvPr/>
+        </p:nvSpPr>
+        <p:spPr>
+          <a:xfrm>
+            <a:off x="3339274" y="6437376"/>
+            <a:ext cx="1194435" cy="152146"/>
+          </a:xfrm>
+          <a:prstGeom prst="rect">
+            <a:avLst/>
+          </a:prstGeom>
+          <a:noFill/>
+        </p:spPr>
+        <p:txBody>
+          <a:bodyPr wrap="square" anchor="t" lIns="0" rIns="0" tIns="0" bIns="0">
+            <a:spAutoFit/>
+          </a:bodyPr>
+          <a:lstStyle/>
+          <a:p>
+            <a:pPr algn="l"/>
+            <a:r>
+              <a:rPr sz="700" b="0" i="0">
+                <a:solidFill>
+                  <a:srgbClr val="6B6690"/>
+                </a:solidFill>
+                <a:latin typeface="Calibri"/>
+              </a:rPr>
+              <a:t>The body of the slot</a:t>
+            </a:r>
+          </a:p>
+        </p:txBody>
+      </p:sp>
+      <p:sp>
+        <p:nvSpPr>
+          <p:cNvPr id="19" name="Oval 18"/>
+          <p:cNvSpPr/>
+          <p:nvPr/>
+        </p:nvSpPr>
+        <p:spPr>
+          <a:xfrm>
+            <a:off x="4625149" y="6492240"/>
+            <a:ext cx="64008" cy="64008"/>
+          </a:xfrm>
+          <a:prstGeom prst="ellipse">
+            <a:avLst/>
+          </a:prstGeom>
+          <a:solidFill>
+            <a:srgbClr val="CFC9EE"/>
+          </a:solidFill>
+          <a:ln>
+            <a:noFill/>
+          </a:ln>
+          <a:effectLst/>
+        </p:spPr>
+        <p:style>
+          <a:lnRef idx="1">
+            <a:schemeClr val="accent1"/>
+          </a:lnRef>
+          <a:fillRef idx="3">
+            <a:schemeClr val="accent1"/>
+          </a:fillRef>
+          <a:effectRef idx="2">
+            <a:schemeClr val="accent1"/>
+          </a:effectRef>
+          <a:fontRef idx="minor">
+            <a:schemeClr val="lt1"/>
+          </a:fontRef>
+        </p:style>
+        <p:txBody>
+          <a:bodyPr rtlCol="0" anchor="ctr" wrap="square"/>
+          <a:lstStyle/>
+          <a:p>
+            <a:pPr algn="ctr"/>
+          </a:p>
+        </p:txBody>
+      </p:sp>
+      <p:sp>
+        <p:nvSpPr>
+          <p:cNvPr id="20" name="TextBox 19"/>
+          <p:cNvSpPr txBox="1"/>
+          <p:nvPr/>
+        </p:nvSpPr>
+        <p:spPr>
+          <a:xfrm>
+            <a:off x="4734877" y="6437376"/>
+            <a:ext cx="872394" cy="152146"/>
+          </a:xfrm>
+          <a:prstGeom prst="rect">
+            <a:avLst/>
+          </a:prstGeom>
+          <a:noFill/>
+        </p:spPr>
+        <p:txBody>
+          <a:bodyPr wrap="square" anchor="t" lIns="0" rIns="0" tIns="0" bIns="0">
+            <a:spAutoFit/>
+          </a:bodyPr>
+          <a:lstStyle/>
+          <a:p>
+            <a:pPr algn="l"/>
+            <a:r>
+              <a:rPr sz="700" b="0" i="0">
+                <a:solidFill>
+                  <a:srgbClr val="6B6690"/>
+                </a:solidFill>
+                <a:latin typeface="Calibri"/>
+              </a:rPr>
+              <a:t>The live demo</a:t>
+            </a:r>
+          </a:p>
+        </p:txBody>
+      </p:sp>
+      <p:sp>
+        <p:nvSpPr>
+          <p:cNvPr id="21" name="Oval 20"/>
+          <p:cNvSpPr/>
+          <p:nvPr/>
+        </p:nvSpPr>
+        <p:spPr>
+          <a:xfrm>
+            <a:off x="5698712" y="6492240"/>
+            <a:ext cx="64008" cy="64008"/>
+          </a:xfrm>
+          <a:prstGeom prst="ellipse">
+            <a:avLst/>
+          </a:prstGeom>
+          <a:solidFill>
+            <a:srgbClr val="5B3FD6"/>
+          </a:solidFill>
+          <a:ln>
+            <a:noFill/>
+          </a:ln>
+          <a:effectLst/>
+        </p:spPr>
+        <p:style>
+          <a:lnRef idx="1">
+            <a:schemeClr val="accent1"/>
+          </a:lnRef>
+          <a:fillRef idx="3">
+            <a:schemeClr val="accent1"/>
+          </a:fillRef>
+          <a:effectRef idx="2">
+            <a:schemeClr val="accent1"/>
+          </a:effectRef>
+          <a:fontRef idx="minor">
+            <a:schemeClr val="lt1"/>
+          </a:fontRef>
+        </p:style>
+        <p:txBody>
+          <a:bodyPr rtlCol="0" anchor="ctr" wrap="square"/>
+          <a:lstStyle/>
+          <a:p>
+            <a:pPr algn="ctr"/>
+          </a:p>
+        </p:txBody>
+      </p:sp>
+      <p:sp>
+        <p:nvSpPr>
+          <p:cNvPr id="22" name="TextBox 21"/>
+          <p:cNvSpPr txBox="1"/>
+          <p:nvPr/>
+        </p:nvSpPr>
+        <p:spPr>
+          <a:xfrm>
+            <a:off x="5808440" y="6437376"/>
+            <a:ext cx="1240440" cy="152146"/>
+          </a:xfrm>
+          <a:prstGeom prst="rect">
+            <a:avLst/>
+          </a:prstGeom>
+          <a:noFill/>
+        </p:spPr>
+        <p:txBody>
+          <a:bodyPr wrap="square" anchor="t" lIns="0" rIns="0" tIns="0" bIns="0">
+            <a:spAutoFit/>
+          </a:bodyPr>
+          <a:lstStyle/>
+          <a:p>
+            <a:pPr algn="l"/>
+            <a:r>
+              <a:rPr sz="700" b="1" i="0">
+                <a:solidFill>
+                  <a:srgbClr val="5B3FD6"/>
+                </a:solidFill>
+                <a:latin typeface="Calibri"/>
+              </a:rPr>
+              <a:t>The panel's questions</a:t>
+            </a:r>
+          </a:p>
+        </p:txBody>
+      </p:sp>
+      <p:sp>
+        <p:nvSpPr>
+          <p:cNvPr id="23" name="TextBox 22"/>
+          <p:cNvSpPr txBox="1"/>
+          <p:nvPr/>
+        </p:nvSpPr>
+        <p:spPr>
+          <a:xfrm>
+            <a:off x="10198303" y="6437376"/>
+            <a:ext cx="1463040" cy="160401"/>
+          </a:xfrm>
+          <a:prstGeom prst="rect">
+            <a:avLst/>
+          </a:prstGeom>
+          <a:noFill/>
+        </p:spPr>
+        <p:txBody>
+          <a:bodyPr wrap="square" anchor="t" lIns="0" rIns="0" tIns="0" bIns="0">
+            <a:spAutoFit/>
+          </a:bodyPr>
+          <a:lstStyle/>
+          <a:p>
+            <a:pPr algn="r"/>
+            <a:r>
+              <a:rPr sz="750" b="0" i="0">
+                <a:solidFill>
+                  <a:srgbClr val="6B6690"/>
+                </a:solidFill>
+                <a:latin typeface="Calibri"/>
+              </a:rPr>
+              <a:t>S19  ·  25 / 25</a:t>
             </a:r>
           </a:p>
         </p:txBody>
@@ -22684,7 +24023,7 @@
                 </a:solidFill>
                 <a:latin typeface="Calibri"/>
               </a:rPr>
-              <a:t>S1  ·  3 / 24</a:t>
+              <a:t>S1  ·  3 / 25</a:t>
             </a:r>
           </a:p>
         </p:txBody>
@@ -24088,7 +25427,7 @@
                 </a:solidFill>
                 <a:latin typeface="Calibri"/>
               </a:rPr>
-              <a:t>S2  ·  4 / 24</a:t>
+              <a:t>S2  ·  4 / 25</a:t>
             </a:r>
           </a:p>
         </p:txBody>
@@ -25286,7 +26625,7 @@
                 </a:solidFill>
                 <a:latin typeface="Calibri"/>
               </a:rPr>
-              <a:t>S3  ·  5 / 24</a:t>
+              <a:t>S3  ·  5 / 25</a:t>
             </a:r>
           </a:p>
         </p:txBody>
@@ -25872,7 +27211,7 @@
                 </a:solidFill>
                 <a:latin typeface="Calibri"/>
               </a:rPr>
-              <a:t>Week 3, Build 1: the presentation</a:t>
+              <a:t>Your answer, in front of the panel</a:t>
             </a:r>
           </a:p>
         </p:txBody>
@@ -25907,7 +27246,7 @@
                 </a:solidFill>
                 <a:latin typeface="Calibri"/>
               </a:rPr>
-              <a:t>6 / 24</a:t>
+              <a:t>6 / 25</a:t>
             </a:r>
           </a:p>
         </p:txBody>
@@ -27516,7 +28855,7 @@
                 </a:solidFill>
                 <a:latin typeface="Calibri"/>
               </a:rPr>
-              <a:t>S4  ·  7 / 24</a:t>
+              <a:t>S4  ·  7 / 25</a:t>
             </a:r>
           </a:p>
         </p:txBody>
@@ -28038,7 +29377,7 @@
                           </a:solidFill>
                           <a:latin typeface="Calibri"/>
                         </a:rPr>
-                        <a:t>Retail-Plus orders per member fell about a third against Retail-Core's 2.7 percent, on 22 members, and chance made a gap that large in none of 5,000 shuffles.</a:t>
+                        <a:t>Retail-Plus revenue per member fell from Rs 3,279 to Rs 2,169 on 22 members, against Retail-Core's Rs 110, and 135 of 5,000 shuffles made a fall that large.</a:t>
                       </a:r>
                     </a:p>
                   </a:txBody>
@@ -28570,7 +29909,7 @@
                 </a:solidFill>
                 <a:latin typeface="Calibri"/>
               </a:rPr>
-              <a:t>S5  ·  8 / 24</a:t>
+              <a:t>S5  ·  8 / 25</a:t>
             </a:r>
           </a:p>
         </p:txBody>
@@ -28965,7 +30304,7 @@
                           </a:solidFill>
                           <a:latin typeface="Calibri"/>
                         </a:rPr>
-                        <a:t>Holds: the measure, the comparison, the count and the chance test, in one sentence</a:t>
+                        <a:t>Holds: the measure, the comparison, the count and the chance test (0.027), in one sentence</a:t>
                       </a:r>
                     </a:p>
                   </a:txBody>
@@ -29688,7 +31027,7 @@
                 </a:solidFill>
                 <a:latin typeface="Calibri"/>
               </a:rPr>
-              <a:t>S6  ·  9 / 24</a:t>
+              <a:t>S6  ·  9 / 25</a:t>
             </a:r>
           </a:p>
         </p:txBody>

--- a/content/W03/SAT/slides/C2_W03_SAT_presentation_format_STUDENT.pptx
+++ b/content/W03/SAT/slides/C2_W03_SAT_presentation_format_STUDENT.pptx
@@ -8047,7 +8047,7 @@
       </p:sp>
       <p:pic>
         <p:nvPicPr>
-          <p:cNvPr id="9" name="mermaid diagram" descr="17cc600c4d1c39fd.png"/>
+          <p:cNvPr id="9" name="mermaid diagram" descr="8cbfdf6ed9e5151c.png"/>
           <p:cNvPicPr>
             <a:picLocks noChangeAspect="1"/>
           </p:cNvPicPr>
@@ -9186,7 +9186,7 @@
       </p:sp>
       <p:pic>
         <p:nvPicPr>
-          <p:cNvPr id="9" name="mermaid diagram" descr="6cbc07735588a086.png"/>
+          <p:cNvPr id="9" name="mermaid diagram" descr="191e197cdcf9e59f.png"/>
           <p:cNvPicPr>
             <a:picLocks noChangeAspect="1"/>
           </p:cNvPicPr>
@@ -12463,7 +12463,7 @@
       </p:sp>
       <p:pic>
         <p:nvPicPr>
-          <p:cNvPr id="27" name="mermaid diagram" descr="c63136565dc4db6b.png"/>
+          <p:cNvPr id="27" name="mermaid diagram" descr="82a043bc9c560555.png"/>
           <p:cNvPicPr>
             <a:picLocks noChangeAspect="1"/>
           </p:cNvPicPr>
@@ -17682,7 +17682,7 @@
       </p:sp>
       <p:pic>
         <p:nvPicPr>
-          <p:cNvPr id="9" name="mermaid diagram" descr="60c46a3435eae6be.png"/>
+          <p:cNvPr id="9" name="mermaid diagram" descr="6a00f2eb8690a011.png"/>
           <p:cNvPicPr>
             <a:picLocks noChangeAspect="1"/>
           </p:cNvPicPr>
@@ -21904,14 +21904,53 @@
       </p:sp>
       <p:sp>
         <p:nvSpPr>
-          <p:cNvPr id="9" name="Rounded Rectangle 8"/>
+          <p:cNvPr id="9" name="TextBox 8"/>
+          <p:cNvSpPr txBox="1"/>
+          <p:nvPr/>
+        </p:nvSpPr>
+        <p:spPr>
+          <a:xfrm>
+            <a:off x="530352" y="1881632"/>
+            <a:ext cx="11130991" cy="409448"/>
+          </a:xfrm>
+          <a:prstGeom prst="rect">
+            <a:avLst/>
+          </a:prstGeom>
+          <a:noFill/>
+        </p:spPr>
+        <p:txBody>
+          <a:bodyPr wrap="square" anchor="t" lIns="0" rIns="0" tIns="0" bIns="0">
+            <a:spAutoFit/>
+          </a:bodyPr>
+          <a:lstStyle/>
+          <a:p>
+            <a:pPr>
+              <a:spcAft>
+                <a:spcPts val="500"/>
+              </a:spcAft>
+            </a:pPr>
+            <a:r>
+              <a:rPr sz="1100" b="0" i="0">
+                <a:solidFill>
+                  <a:srgbClr val="1A1440"/>
+                </a:solidFill>
+                <a:latin typeface="Calibri"/>
+              </a:rPr>
+              <a:t>&lt;!-- sync:rubric:W03/mini-project --&gt;</a:t>
+            </a:r>
+          </a:p>
+        </p:txBody>
+      </p:sp>
+      <p:sp>
+        <p:nvSpPr>
+          <p:cNvPr id="10" name="Rounded Rectangle 9"/>
           <p:cNvSpPr/>
           <p:nvPr/>
         </p:nvSpPr>
         <p:spPr>
           <a:xfrm>
-            <a:off x="530352" y="1956816"/>
-            <a:ext cx="11130991" cy="736600"/>
+            <a:off x="530352" y="2419096"/>
+            <a:ext cx="11130991" cy="629920"/>
           </a:xfrm>
           <a:prstGeom prst="roundRect">
             <a:avLst>
@@ -21952,14 +21991,14 @@
       </p:sp>
       <p:sp>
         <p:nvSpPr>
-          <p:cNvPr id="10" name="Rounded Rectangle 9"/>
+          <p:cNvPr id="11" name="Rounded Rectangle 10"/>
           <p:cNvSpPr/>
           <p:nvPr/>
         </p:nvSpPr>
         <p:spPr>
           <a:xfrm>
-            <a:off x="676656" y="2084832"/>
-            <a:ext cx="45720" cy="480568"/>
+            <a:off x="676656" y="2547112"/>
+            <a:ext cx="45720" cy="373888"/>
           </a:xfrm>
           <a:prstGeom prst="roundRect">
             <a:avLst>
@@ -21998,14 +22037,14 @@
       </p:sp>
       <p:sp>
         <p:nvSpPr>
-          <p:cNvPr id="11" name="TextBox 10"/>
-          <p:cNvSpPr txBox="1"/>
-          <p:nvPr/>
-        </p:nvSpPr>
-        <p:spPr>
-          <a:xfrm>
-            <a:off x="877824" y="2075688"/>
-            <a:ext cx="10564063" cy="553720"/>
+          <p:cNvPr id="12" name="TextBox 11"/>
+          <p:cNvSpPr txBox="1"/>
+          <p:nvPr/>
+        </p:nvSpPr>
+        <p:spPr>
+          <a:xfrm>
+            <a:off x="877824" y="2537968"/>
+            <a:ext cx="10564063" cy="447040"/>
           </a:xfrm>
           <a:prstGeom prst="rect">
             <a:avLst/>
@@ -22019,7 +22058,7 @@
           <a:lstStyle/>
           <a:p>
             <a:r>
-              <a:rPr sz="1300" b="1">
+              <a:rPr sz="1000" b="1">
                 <a:solidFill>
                   <a:srgbClr val="5B3FD6"/>
                 </a:solidFill>
@@ -22028,7 +22067,7 @@
               <a:t>Mini project, 40 marks. </a:t>
             </a:r>
             <a:r>
-              <a:rPr sz="1300" b="0" i="0">
+              <a:rPr sz="1000" b="0" i="0">
                 <a:solidFill>
                   <a:srgbClr val="1A1440"/>
                 </a:solidFill>
@@ -22041,15 +22080,15 @@
       </p:sp>
       <p:graphicFrame>
         <p:nvGraphicFramePr>
-          <p:cNvPr id="12" name="Table 11"/>
+          <p:cNvPr id="13" name="Table 12"/>
           <p:cNvGraphicFramePr>
             <a:graphicFrameLocks noGrp="1"/>
           </p:cNvGraphicFramePr>
           <p:nvPr/>
         </p:nvGraphicFramePr>
         <p:xfrm>
-          <a:off x="530352" y="2858008"/>
-          <a:ext cx="11130990" cy="2840736"/>
+          <a:off x="530352" y="3213608"/>
+          <a:ext cx="11130991" cy="2121408"/>
         </p:xfrm>
         <a:graphic>
           <a:graphicData uri="http://schemas.openxmlformats.org/drawingml/2006/table">
@@ -22058,18 +22097,18 @@
                 <a:tableStyleId>{2D5ABB26-0587-4C30-8999-92F81FD0307C}</a:tableStyleId>
               </a:tblPr>
               <a:tblGrid>
-                <a:gridCol w="2886034"/>
+                <a:gridCol w="2388579"/>
                 <a:gridCol w="914400"/>
-                <a:gridCol w="7330556"/>
+                <a:gridCol w="7828012"/>
               </a:tblGrid>
-              <a:tr h="335280">
+              <a:tr h="310896">
                 <a:tc>
                   <a:txBody>
                     <a:bodyPr/>
                     <a:lstStyle/>
                     <a:p>
                       <a:r>
-                        <a:rPr sz="1250" b="1" i="0">
+                        <a:rPr sz="950" b="1" i="0">
                           <a:solidFill>
                             <a:srgbClr val="FFFFFF"/>
                           </a:solidFill>
@@ -22091,7 +22130,7 @@
                     <a:lstStyle/>
                     <a:p>
                       <a:r>
-                        <a:rPr sz="1250" b="1" i="0">
+                        <a:rPr sz="950" b="1" i="0">
                           <a:solidFill>
                             <a:srgbClr val="FFFFFF"/>
                           </a:solidFill>
@@ -22113,7 +22152,7 @@
                     <a:lstStyle/>
                     <a:p>
                       <a:r>
-                        <a:rPr sz="1250" b="1" i="0">
+                        <a:rPr sz="950" b="1" i="0">
                           <a:solidFill>
                             <a:srgbClr val="FFFFFF"/>
                           </a:solidFill>
@@ -22130,14 +22169,14 @@
                   </a:tcPr>
                 </a:tc>
               </a:tr>
-              <a:tr h="542544">
+              <a:tr h="310896">
                 <a:tc>
                   <a:txBody>
                     <a:bodyPr/>
                     <a:lstStyle/>
                     <a:p>
                       <a:r>
-                        <a:rPr sz="1200" b="0" i="0">
+                        <a:rPr sz="900" b="0" i="0">
                           <a:solidFill>
                             <a:srgbClr val="1A1440"/>
                           </a:solidFill>
@@ -22159,7 +22198,7 @@
                     <a:lstStyle/>
                     <a:p>
                       <a:r>
-                        <a:rPr sz="1200" b="0" i="0">
+                        <a:rPr sz="900" b="0" i="0">
                           <a:solidFill>
                             <a:srgbClr val="1A1440"/>
                           </a:solidFill>
@@ -22181,7 +22220,7 @@
                     <a:lstStyle/>
                     <a:p>
                       <a:r>
-                        <a:rPr sz="1200" b="0" i="0">
+                        <a:rPr sz="900" b="0" i="0">
                           <a:solidFill>
                             <a:srgbClr val="1A1440"/>
                           </a:solidFill>
@@ -22198,14 +22237,14 @@
                   </a:tcPr>
                 </a:tc>
               </a:tr>
-              <a:tr h="542544">
+              <a:tr h="438912">
                 <a:tc>
                   <a:txBody>
                     <a:bodyPr/>
                     <a:lstStyle/>
                     <a:p>
                       <a:r>
-                        <a:rPr sz="1200" b="0" i="0">
+                        <a:rPr sz="900" b="0" i="0">
                           <a:solidFill>
                             <a:srgbClr val="1A1440"/>
                           </a:solidFill>
@@ -22227,7 +22266,7 @@
                     <a:lstStyle/>
                     <a:p>
                       <a:r>
-                        <a:rPr sz="1200" b="0" i="0">
+                        <a:rPr sz="900" b="0" i="0">
                           <a:solidFill>
                             <a:srgbClr val="1A1440"/>
                           </a:solidFill>
@@ -22249,13 +22288,13 @@
                     <a:lstStyle/>
                     <a:p>
                       <a:r>
-                        <a:rPr sz="1200" b="0" i="0">
+                        <a:rPr sz="900" b="0" i="0">
                           <a:solidFill>
                             <a:srgbClr val="1A1440"/>
                           </a:solidFill>
                           <a:latin typeface="Calibri"/>
                         </a:rPr>
-                        <a:t>The data is profiled before it is touched, every cleaning call is in the decisions log with its reason, and counts and rupees reconcile across files.</a:t>
+                        <a:t>The data is profiled before it is touched, every cleaning call is in the decisions log with its reason, and counts and dollars reconcile across files.</a:t>
                       </a:r>
                     </a:p>
                   </a:txBody>
@@ -22266,14 +22305,14 @@
                   </a:tcPr>
                 </a:tc>
               </a:tr>
-              <a:tr h="542544">
+              <a:tr h="438912">
                 <a:tc>
                   <a:txBody>
                     <a:bodyPr/>
                     <a:lstStyle/>
                     <a:p>
                       <a:r>
-                        <a:rPr sz="1200" b="0" i="0">
+                        <a:rPr sz="900" b="0" i="0">
                           <a:solidFill>
                             <a:srgbClr val="1A1440"/>
                           </a:solidFill>
@@ -22295,7 +22334,7 @@
                     <a:lstStyle/>
                     <a:p>
                       <a:r>
-                        <a:rPr sz="1200" b="0" i="0">
+                        <a:rPr sz="900" b="0" i="0">
                           <a:solidFill>
                             <a:srgbClr val="1A1440"/>
                           </a:solidFill>
@@ -22317,7 +22356,7 @@
                     <a:lstStyle/>
                     <a:p>
                       <a:r>
-                        <a:rPr sz="1200" b="0" i="0">
+                        <a:rPr sz="900" b="0" i="0">
                           <a:solidFill>
                             <a:srgbClr val="1A1440"/>
                           </a:solidFill>
@@ -22334,14 +22373,14 @@
                   </a:tcPr>
                 </a:tc>
               </a:tr>
-              <a:tr h="542544">
+              <a:tr h="310896">
                 <a:tc>
                   <a:txBody>
                     <a:bodyPr/>
                     <a:lstStyle/>
                     <a:p>
                       <a:r>
-                        <a:rPr sz="1200" b="0" i="0">
+                        <a:rPr sz="900" b="0" i="0">
                           <a:solidFill>
                             <a:srgbClr val="1A1440"/>
                           </a:solidFill>
@@ -22363,7 +22402,7 @@
                     <a:lstStyle/>
                     <a:p>
                       <a:r>
-                        <a:rPr sz="1200" b="0" i="0">
+                        <a:rPr sz="900" b="0" i="0">
                           <a:solidFill>
                             <a:srgbClr val="1A1440"/>
                           </a:solidFill>
@@ -22385,7 +22424,7 @@
                     <a:lstStyle/>
                     <a:p>
                       <a:r>
-                        <a:rPr sz="1200" b="0" i="0">
+                        <a:rPr sz="900" b="0" i="0">
                           <a:solidFill>
                             <a:srgbClr val="1A1440"/>
                           </a:solidFill>
@@ -22402,14 +22441,14 @@
                   </a:tcPr>
                 </a:tc>
               </a:tr>
-              <a:tr h="335280">
+              <a:tr h="310896">
                 <a:tc>
                   <a:txBody>
                     <a:bodyPr/>
                     <a:lstStyle/>
                     <a:p>
                       <a:r>
-                        <a:rPr sz="1200" b="0" i="0">
+                        <a:rPr sz="900" b="0" i="0">
                           <a:solidFill>
                             <a:srgbClr val="1A1440"/>
                           </a:solidFill>
@@ -22431,7 +22470,7 @@
                     <a:lstStyle/>
                     <a:p>
                       <a:r>
-                        <a:rPr sz="1200" b="0" i="0">
+                        <a:rPr sz="900" b="0" i="0">
                           <a:solidFill>
                             <a:srgbClr val="1A1440"/>
                           </a:solidFill>
@@ -22453,7 +22492,7 @@
                     <a:lstStyle/>
                     <a:p>
                       <a:r>
-                        <a:rPr sz="1200" b="0" i="0">
+                        <a:rPr sz="900" b="0" i="0">
                           <a:solidFill>
                             <a:srgbClr val="1A1440"/>
                           </a:solidFill>
@@ -22476,7 +22515,46 @@
       </p:graphicFrame>
       <p:sp>
         <p:nvSpPr>
-          <p:cNvPr id="13" name="Oval 12"/>
+          <p:cNvPr id="14" name="TextBox 13"/>
+          <p:cNvSpPr txBox="1"/>
+          <p:nvPr/>
+        </p:nvSpPr>
+        <p:spPr>
+          <a:xfrm>
+            <a:off x="530352" y="5591048"/>
+            <a:ext cx="11130991" cy="409448"/>
+          </a:xfrm>
+          <a:prstGeom prst="rect">
+            <a:avLst/>
+          </a:prstGeom>
+          <a:noFill/>
+        </p:spPr>
+        <p:txBody>
+          <a:bodyPr wrap="square" anchor="t" lIns="0" rIns="0" tIns="0" bIns="0">
+            <a:spAutoFit/>
+          </a:bodyPr>
+          <a:lstStyle/>
+          <a:p>
+            <a:pPr>
+              <a:spcAft>
+                <a:spcPts val="500"/>
+              </a:spcAft>
+            </a:pPr>
+            <a:r>
+              <a:rPr sz="1100" b="0" i="0">
+                <a:solidFill>
+                  <a:srgbClr val="1A1440"/>
+                </a:solidFill>
+                <a:latin typeface="Calibri"/>
+              </a:rPr>
+              <a:t>&lt;!-- /sync:rubric:W03/mini-project --&gt;</a:t>
+            </a:r>
+          </a:p>
+        </p:txBody>
+      </p:sp>
+      <p:sp>
+        <p:nvSpPr>
+          <p:cNvPr id="15" name="Oval 14"/>
           <p:cNvSpPr/>
           <p:nvPr/>
         </p:nvSpPr>
@@ -22520,7 +22598,7 @@
       </p:sp>
       <p:sp>
         <p:nvSpPr>
-          <p:cNvPr id="14" name="TextBox 13"/>
+          <p:cNvPr id="16" name="TextBox 15"/>
           <p:cNvSpPr txBox="1"/>
           <p:nvPr/>
         </p:nvSpPr>
@@ -22555,7 +22633,7 @@
       </p:sp>
       <p:sp>
         <p:nvSpPr>
-          <p:cNvPr id="15" name="Oval 14"/>
+          <p:cNvPr id="17" name="Oval 16"/>
           <p:cNvSpPr/>
           <p:nvPr/>
         </p:nvSpPr>
@@ -22599,7 +22677,7 @@
       </p:sp>
       <p:sp>
         <p:nvSpPr>
-          <p:cNvPr id="16" name="TextBox 15"/>
+          <p:cNvPr id="18" name="TextBox 17"/>
           <p:cNvSpPr txBox="1"/>
           <p:nvPr/>
         </p:nvSpPr>
@@ -22634,7 +22712,7 @@
       </p:sp>
       <p:sp>
         <p:nvSpPr>
-          <p:cNvPr id="17" name="Oval 16"/>
+          <p:cNvPr id="19" name="Oval 18"/>
           <p:cNvSpPr/>
           <p:nvPr/>
         </p:nvSpPr>
@@ -22678,7 +22756,7 @@
       </p:sp>
       <p:sp>
         <p:nvSpPr>
-          <p:cNvPr id="18" name="TextBox 17"/>
+          <p:cNvPr id="20" name="TextBox 19"/>
           <p:cNvSpPr txBox="1"/>
           <p:nvPr/>
         </p:nvSpPr>
@@ -22713,7 +22791,7 @@
       </p:sp>
       <p:sp>
         <p:nvSpPr>
-          <p:cNvPr id="19" name="Oval 18"/>
+          <p:cNvPr id="21" name="Oval 20"/>
           <p:cNvSpPr/>
           <p:nvPr/>
         </p:nvSpPr>
@@ -22757,7 +22835,7 @@
       </p:sp>
       <p:sp>
         <p:nvSpPr>
-          <p:cNvPr id="20" name="TextBox 19"/>
+          <p:cNvPr id="22" name="TextBox 21"/>
           <p:cNvSpPr txBox="1"/>
           <p:nvPr/>
         </p:nvSpPr>
@@ -22792,7 +22870,7 @@
       </p:sp>
       <p:sp>
         <p:nvSpPr>
-          <p:cNvPr id="21" name="Oval 20"/>
+          <p:cNvPr id="23" name="Oval 22"/>
           <p:cNvSpPr/>
           <p:nvPr/>
         </p:nvSpPr>
@@ -22836,7 +22914,7 @@
       </p:sp>
       <p:sp>
         <p:nvSpPr>
-          <p:cNvPr id="22" name="TextBox 21"/>
+          <p:cNvPr id="24" name="TextBox 23"/>
           <p:cNvSpPr txBox="1"/>
           <p:nvPr/>
         </p:nvSpPr>
@@ -22871,7 +22949,7 @@
       </p:sp>
       <p:sp>
         <p:nvSpPr>
-          <p:cNvPr id="23" name="TextBox 22"/>
+          <p:cNvPr id="25" name="TextBox 24"/>
           <p:cNvSpPr txBox="1"/>
           <p:nvPr/>
         </p:nvSpPr>
@@ -24448,7 +24526,7 @@
                 </a:solidFill>
                 <a:latin typeface="Georgia"/>
               </a:rPr>
-              <a:t>2 cities</a:t>
+              <a:t>2 metros</a:t>
             </a:r>
           </a:p>
         </p:txBody>
@@ -24518,7 +24596,7 @@
                 </a:solidFill>
                 <a:latin typeface="Calibri"/>
               </a:rPr>
-              <a:t>in Q2, per the booking data</a:t>
+              <a:t>in Q3, per the booking data</a:t>
             </a:r>
           </a:p>
         </p:txBody>
@@ -24667,7 +24745,7 @@
                 </a:solidFill>
                 <a:latin typeface="Calibri"/>
               </a:rPr>
-              <a:t>free home collection, per marketing</a:t>
+              <a:t>free at-home collection, per marketing</a:t>
             </a:r>
           </a:p>
         </p:txBody>
@@ -24746,7 +24824,7 @@
                 </a:solidFill>
                 <a:latin typeface="Georgia"/>
               </a:rPr>
-              <a:t>1 clinic</a:t>
+              <a:t>1 centre</a:t>
             </a:r>
           </a:p>
         </p:txBody>
@@ -24816,7 +24894,7 @@
                 </a:solidFill>
                 <a:latin typeface="Calibri"/>
               </a:rPr>
-              <a:t>per the clinics' operations head</a:t>
+              <a:t>per the centres' operations head</a:t>
             </a:r>
           </a:p>
         </p:txBody>
@@ -24997,7 +25075,7 @@
                 </a:solidFill>
                 <a:latin typeface="Calibri"/>
               </a:rPr>
-              <a:t>Her data team adds two things it knows: two cities changed booking systems in Q2, and the payment feed keys invoices in its own format. Invoices and collections disagree, says the finance head.</a:t>
+              <a:t>Her data team adds two things it knows: two metros changed booking systems in Q3, and the posting system keys claims in its own format. Claims and collections disagree, says the finance head.</a:t>
             </a:r>
           </a:p>
         </p:txBody>
@@ -25675,7 +25753,7 @@
       </p:sp>
       <p:pic>
         <p:nvPicPr>
-          <p:cNvPr id="9" name="mermaid diagram" descr="3d371e6dc20be8ea.png"/>
+          <p:cNvPr id="9" name="mermaid diagram" descr="75da118c6c09b653.png"/>
           <p:cNvPicPr>
             <a:picLocks noChangeAspect="1"/>
           </p:cNvPicPr>
@@ -27494,7 +27572,7 @@
       </p:sp>
       <p:pic>
         <p:nvPicPr>
-          <p:cNvPr id="9" name="mermaid diagram" descr="7fed46ddb74270e8.png"/>
+          <p:cNvPr id="9" name="mermaid diagram" descr="6183dc27bdd6055b.png"/>
           <p:cNvPicPr>
             <a:picLocks noChangeAspect="1"/>
           </p:cNvPicPr>

--- a/content/W03/SAT/slides/C2_W03_SAT_presentation_format_STUDENT.pptx
+++ b/content/W03/SAT/slides/C2_W03_SAT_presentation_format_STUDENT.pptx
@@ -8047,7 +8047,7 @@
       </p:sp>
       <p:pic>
         <p:nvPicPr>
-          <p:cNvPr id="9" name="mermaid diagram" descr="8cbfdf6ed9e5151c.png"/>
+          <p:cNvPr id="9" name="mermaid diagram" descr="9cc27da138356b74.png"/>
           <p:cNvPicPr>
             <a:picLocks noChangeAspect="1"/>
           </p:cNvPicPr>
@@ -9186,7 +9186,7 @@
       </p:sp>
       <p:pic>
         <p:nvPicPr>
-          <p:cNvPr id="9" name="mermaid diagram" descr="191e197cdcf9e59f.png"/>
+          <p:cNvPr id="9" name="mermaid diagram" descr="4ced1e7efd73d80d.png"/>
           <p:cNvPicPr>
             <a:picLocks noChangeAspect="1"/>
           </p:cNvPicPr>
@@ -12463,7 +12463,7 @@
       </p:sp>
       <p:pic>
         <p:nvPicPr>
-          <p:cNvPr id="27" name="mermaid diagram" descr="82a043bc9c560555.png"/>
+          <p:cNvPr id="27" name="mermaid diagram" descr="9250a54a9cf90071.png"/>
           <p:cNvPicPr>
             <a:picLocks noChangeAspect="1"/>
           </p:cNvPicPr>
@@ -17682,7 +17682,7 @@
       </p:sp>
       <p:pic>
         <p:nvPicPr>
-          <p:cNvPr id="9" name="mermaid diagram" descr="6a00f2eb8690a011.png"/>
+          <p:cNvPr id="9" name="mermaid diagram" descr="70d0637ba1235123.png"/>
           <p:cNvPicPr>
             <a:picLocks noChangeAspect="1"/>
           </p:cNvPicPr>
@@ -21904,53 +21904,14 @@
       </p:sp>
       <p:sp>
         <p:nvSpPr>
-          <p:cNvPr id="9" name="TextBox 8"/>
-          <p:cNvSpPr txBox="1"/>
-          <p:nvPr/>
-        </p:nvSpPr>
-        <p:spPr>
-          <a:xfrm>
-            <a:off x="530352" y="1881632"/>
-            <a:ext cx="11130991" cy="409448"/>
-          </a:xfrm>
-          <a:prstGeom prst="rect">
-            <a:avLst/>
-          </a:prstGeom>
-          <a:noFill/>
-        </p:spPr>
-        <p:txBody>
-          <a:bodyPr wrap="square" anchor="t" lIns="0" rIns="0" tIns="0" bIns="0">
-            <a:spAutoFit/>
-          </a:bodyPr>
-          <a:lstStyle/>
-          <a:p>
-            <a:pPr>
-              <a:spcAft>
-                <a:spcPts val="500"/>
-              </a:spcAft>
-            </a:pPr>
-            <a:r>
-              <a:rPr sz="1100" b="0" i="0">
-                <a:solidFill>
-                  <a:srgbClr val="1A1440"/>
-                </a:solidFill>
-                <a:latin typeface="Calibri"/>
-              </a:rPr>
-              <a:t>&lt;!-- sync:rubric:W03/mini-project --&gt;</a:t>
-            </a:r>
-          </a:p>
-        </p:txBody>
-      </p:sp>
-      <p:sp>
-        <p:nvSpPr>
-          <p:cNvPr id="10" name="Rounded Rectangle 9"/>
+          <p:cNvPr id="9" name="Rounded Rectangle 8"/>
           <p:cNvSpPr/>
           <p:nvPr/>
         </p:nvSpPr>
         <p:spPr>
           <a:xfrm>
-            <a:off x="530352" y="2419096"/>
-            <a:ext cx="11130991" cy="629920"/>
+            <a:off x="530352" y="1956816"/>
+            <a:ext cx="11130991" cy="736600"/>
           </a:xfrm>
           <a:prstGeom prst="roundRect">
             <a:avLst>
@@ -21991,14 +21952,14 @@
       </p:sp>
       <p:sp>
         <p:nvSpPr>
-          <p:cNvPr id="11" name="Rounded Rectangle 10"/>
+          <p:cNvPr id="10" name="Rounded Rectangle 9"/>
           <p:cNvSpPr/>
           <p:nvPr/>
         </p:nvSpPr>
         <p:spPr>
           <a:xfrm>
-            <a:off x="676656" y="2547112"/>
-            <a:ext cx="45720" cy="373888"/>
+            <a:off x="676656" y="2084832"/>
+            <a:ext cx="45720" cy="480568"/>
           </a:xfrm>
           <a:prstGeom prst="roundRect">
             <a:avLst>
@@ -22037,14 +21998,14 @@
       </p:sp>
       <p:sp>
         <p:nvSpPr>
-          <p:cNvPr id="12" name="TextBox 11"/>
-          <p:cNvSpPr txBox="1"/>
-          <p:nvPr/>
-        </p:nvSpPr>
-        <p:spPr>
-          <a:xfrm>
-            <a:off x="877824" y="2537968"/>
-            <a:ext cx="10564063" cy="447040"/>
+          <p:cNvPr id="11" name="TextBox 10"/>
+          <p:cNvSpPr txBox="1"/>
+          <p:nvPr/>
+        </p:nvSpPr>
+        <p:spPr>
+          <a:xfrm>
+            <a:off x="877824" y="2075688"/>
+            <a:ext cx="10564063" cy="553720"/>
           </a:xfrm>
           <a:prstGeom prst="rect">
             <a:avLst/>
@@ -22058,7 +22019,7 @@
           <a:lstStyle/>
           <a:p>
             <a:r>
-              <a:rPr sz="1000" b="1">
+              <a:rPr sz="1300" b="1">
                 <a:solidFill>
                   <a:srgbClr val="5B3FD6"/>
                 </a:solidFill>
@@ -22067,7 +22028,7 @@
               <a:t>Mini project, 40 marks. </a:t>
             </a:r>
             <a:r>
-              <a:rPr sz="1000" b="0" i="0">
+              <a:rPr sz="1300" b="0" i="0">
                 <a:solidFill>
                   <a:srgbClr val="1A1440"/>
                 </a:solidFill>
@@ -22080,15 +22041,15 @@
       </p:sp>
       <p:graphicFrame>
         <p:nvGraphicFramePr>
-          <p:cNvPr id="13" name="Table 12"/>
+          <p:cNvPr id="12" name="Table 11"/>
           <p:cNvGraphicFramePr>
             <a:graphicFrameLocks noGrp="1"/>
           </p:cNvGraphicFramePr>
           <p:nvPr/>
         </p:nvGraphicFramePr>
         <p:xfrm>
-          <a:off x="530352" y="3213608"/>
-          <a:ext cx="11130991" cy="2121408"/>
+          <a:off x="530352" y="2858008"/>
+          <a:ext cx="11130990" cy="2840736"/>
         </p:xfrm>
         <a:graphic>
           <a:graphicData uri="http://schemas.openxmlformats.org/drawingml/2006/table">
@@ -22097,18 +22058,18 @@
                 <a:tableStyleId>{2D5ABB26-0587-4C30-8999-92F81FD0307C}</a:tableStyleId>
               </a:tblPr>
               <a:tblGrid>
-                <a:gridCol w="2388579"/>
+                <a:gridCol w="2886034"/>
                 <a:gridCol w="914400"/>
-                <a:gridCol w="7828012"/>
+                <a:gridCol w="7330556"/>
               </a:tblGrid>
-              <a:tr h="310896">
+              <a:tr h="335280">
                 <a:tc>
                   <a:txBody>
                     <a:bodyPr/>
                     <a:lstStyle/>
                     <a:p>
                       <a:r>
-                        <a:rPr sz="950" b="1" i="0">
+                        <a:rPr sz="1250" b="1" i="0">
                           <a:solidFill>
                             <a:srgbClr val="FFFFFF"/>
                           </a:solidFill>
@@ -22130,7 +22091,7 @@
                     <a:lstStyle/>
                     <a:p>
                       <a:r>
-                        <a:rPr sz="950" b="1" i="0">
+                        <a:rPr sz="1250" b="1" i="0">
                           <a:solidFill>
                             <a:srgbClr val="FFFFFF"/>
                           </a:solidFill>
@@ -22152,7 +22113,7 @@
                     <a:lstStyle/>
                     <a:p>
                       <a:r>
-                        <a:rPr sz="950" b="1" i="0">
+                        <a:rPr sz="1250" b="1" i="0">
                           <a:solidFill>
                             <a:srgbClr val="FFFFFF"/>
                           </a:solidFill>
@@ -22169,14 +22130,14 @@
                   </a:tcPr>
                 </a:tc>
               </a:tr>
-              <a:tr h="310896">
+              <a:tr h="542544">
                 <a:tc>
                   <a:txBody>
                     <a:bodyPr/>
                     <a:lstStyle/>
                     <a:p>
                       <a:r>
-                        <a:rPr sz="900" b="0" i="0">
+                        <a:rPr sz="1200" b="0" i="0">
                           <a:solidFill>
                             <a:srgbClr val="1A1440"/>
                           </a:solidFill>
@@ -22198,7 +22159,7 @@
                     <a:lstStyle/>
                     <a:p>
                       <a:r>
-                        <a:rPr sz="900" b="0" i="0">
+                        <a:rPr sz="1200" b="0" i="0">
                           <a:solidFill>
                             <a:srgbClr val="1A1440"/>
                           </a:solidFill>
@@ -22220,7 +22181,7 @@
                     <a:lstStyle/>
                     <a:p>
                       <a:r>
-                        <a:rPr sz="900" b="0" i="0">
+                        <a:rPr sz="1200" b="0" i="0">
                           <a:solidFill>
                             <a:srgbClr val="1A1440"/>
                           </a:solidFill>
@@ -22237,14 +22198,14 @@
                   </a:tcPr>
                 </a:tc>
               </a:tr>
-              <a:tr h="438912">
+              <a:tr h="542544">
                 <a:tc>
                   <a:txBody>
                     <a:bodyPr/>
                     <a:lstStyle/>
                     <a:p>
                       <a:r>
-                        <a:rPr sz="900" b="0" i="0">
+                        <a:rPr sz="1200" b="0" i="0">
                           <a:solidFill>
                             <a:srgbClr val="1A1440"/>
                           </a:solidFill>
@@ -22266,7 +22227,7 @@
                     <a:lstStyle/>
                     <a:p>
                       <a:r>
-                        <a:rPr sz="900" b="0" i="0">
+                        <a:rPr sz="1200" b="0" i="0">
                           <a:solidFill>
                             <a:srgbClr val="1A1440"/>
                           </a:solidFill>
@@ -22288,7 +22249,7 @@
                     <a:lstStyle/>
                     <a:p>
                       <a:r>
-                        <a:rPr sz="900" b="0" i="0">
+                        <a:rPr sz="1200" b="0" i="0">
                           <a:solidFill>
                             <a:srgbClr val="1A1440"/>
                           </a:solidFill>
@@ -22305,14 +22266,14 @@
                   </a:tcPr>
                 </a:tc>
               </a:tr>
-              <a:tr h="438912">
+              <a:tr h="542544">
                 <a:tc>
                   <a:txBody>
                     <a:bodyPr/>
                     <a:lstStyle/>
                     <a:p>
                       <a:r>
-                        <a:rPr sz="900" b="0" i="0">
+                        <a:rPr sz="1200" b="0" i="0">
                           <a:solidFill>
                             <a:srgbClr val="1A1440"/>
                           </a:solidFill>
@@ -22334,7 +22295,7 @@
                     <a:lstStyle/>
                     <a:p>
                       <a:r>
-                        <a:rPr sz="900" b="0" i="0">
+                        <a:rPr sz="1200" b="0" i="0">
                           <a:solidFill>
                             <a:srgbClr val="1A1440"/>
                           </a:solidFill>
@@ -22356,7 +22317,7 @@
                     <a:lstStyle/>
                     <a:p>
                       <a:r>
-                        <a:rPr sz="900" b="0" i="0">
+                        <a:rPr sz="1200" b="0" i="0">
                           <a:solidFill>
                             <a:srgbClr val="1A1440"/>
                           </a:solidFill>
@@ -22373,14 +22334,14 @@
                   </a:tcPr>
                 </a:tc>
               </a:tr>
-              <a:tr h="310896">
+              <a:tr h="542544">
                 <a:tc>
                   <a:txBody>
                     <a:bodyPr/>
                     <a:lstStyle/>
                     <a:p>
                       <a:r>
-                        <a:rPr sz="900" b="0" i="0">
+                        <a:rPr sz="1200" b="0" i="0">
                           <a:solidFill>
                             <a:srgbClr val="1A1440"/>
                           </a:solidFill>
@@ -22402,7 +22363,7 @@
                     <a:lstStyle/>
                     <a:p>
                       <a:r>
-                        <a:rPr sz="900" b="0" i="0">
+                        <a:rPr sz="1200" b="0" i="0">
                           <a:solidFill>
                             <a:srgbClr val="1A1440"/>
                           </a:solidFill>
@@ -22424,7 +22385,7 @@
                     <a:lstStyle/>
                     <a:p>
                       <a:r>
-                        <a:rPr sz="900" b="0" i="0">
+                        <a:rPr sz="1200" b="0" i="0">
                           <a:solidFill>
                             <a:srgbClr val="1A1440"/>
                           </a:solidFill>
@@ -22441,14 +22402,14 @@
                   </a:tcPr>
                 </a:tc>
               </a:tr>
-              <a:tr h="310896">
+              <a:tr h="335280">
                 <a:tc>
                   <a:txBody>
                     <a:bodyPr/>
                     <a:lstStyle/>
                     <a:p>
                       <a:r>
-                        <a:rPr sz="900" b="0" i="0">
+                        <a:rPr sz="1200" b="0" i="0">
                           <a:solidFill>
                             <a:srgbClr val="1A1440"/>
                           </a:solidFill>
@@ -22470,7 +22431,7 @@
                     <a:lstStyle/>
                     <a:p>
                       <a:r>
-                        <a:rPr sz="900" b="0" i="0">
+                        <a:rPr sz="1200" b="0" i="0">
                           <a:solidFill>
                             <a:srgbClr val="1A1440"/>
                           </a:solidFill>
@@ -22492,7 +22453,7 @@
                     <a:lstStyle/>
                     <a:p>
                       <a:r>
-                        <a:rPr sz="900" b="0" i="0">
+                        <a:rPr sz="1200" b="0" i="0">
                           <a:solidFill>
                             <a:srgbClr val="1A1440"/>
                           </a:solidFill>
@@ -22515,46 +22476,7 @@
       </p:graphicFrame>
       <p:sp>
         <p:nvSpPr>
-          <p:cNvPr id="14" name="TextBox 13"/>
-          <p:cNvSpPr txBox="1"/>
-          <p:nvPr/>
-        </p:nvSpPr>
-        <p:spPr>
-          <a:xfrm>
-            <a:off x="530352" y="5591048"/>
-            <a:ext cx="11130991" cy="409448"/>
-          </a:xfrm>
-          <a:prstGeom prst="rect">
-            <a:avLst/>
-          </a:prstGeom>
-          <a:noFill/>
-        </p:spPr>
-        <p:txBody>
-          <a:bodyPr wrap="square" anchor="t" lIns="0" rIns="0" tIns="0" bIns="0">
-            <a:spAutoFit/>
-          </a:bodyPr>
-          <a:lstStyle/>
-          <a:p>
-            <a:pPr>
-              <a:spcAft>
-                <a:spcPts val="500"/>
-              </a:spcAft>
-            </a:pPr>
-            <a:r>
-              <a:rPr sz="1100" b="0" i="0">
-                <a:solidFill>
-                  <a:srgbClr val="1A1440"/>
-                </a:solidFill>
-                <a:latin typeface="Calibri"/>
-              </a:rPr>
-              <a:t>&lt;!-- /sync:rubric:W03/mini-project --&gt;</a:t>
-            </a:r>
-          </a:p>
-        </p:txBody>
-      </p:sp>
-      <p:sp>
-        <p:nvSpPr>
-          <p:cNvPr id="15" name="Oval 14"/>
+          <p:cNvPr id="13" name="Oval 12"/>
           <p:cNvSpPr/>
           <p:nvPr/>
         </p:nvSpPr>
@@ -22598,7 +22520,7 @@
       </p:sp>
       <p:sp>
         <p:nvSpPr>
-          <p:cNvPr id="16" name="TextBox 15"/>
+          <p:cNvPr id="14" name="TextBox 13"/>
           <p:cNvSpPr txBox="1"/>
           <p:nvPr/>
         </p:nvSpPr>
@@ -22633,7 +22555,7 @@
       </p:sp>
       <p:sp>
         <p:nvSpPr>
-          <p:cNvPr id="17" name="Oval 16"/>
+          <p:cNvPr id="15" name="Oval 14"/>
           <p:cNvSpPr/>
           <p:nvPr/>
         </p:nvSpPr>
@@ -22677,7 +22599,7 @@
       </p:sp>
       <p:sp>
         <p:nvSpPr>
-          <p:cNvPr id="18" name="TextBox 17"/>
+          <p:cNvPr id="16" name="TextBox 15"/>
           <p:cNvSpPr txBox="1"/>
           <p:nvPr/>
         </p:nvSpPr>
@@ -22712,7 +22634,7 @@
       </p:sp>
       <p:sp>
         <p:nvSpPr>
-          <p:cNvPr id="19" name="Oval 18"/>
+          <p:cNvPr id="17" name="Oval 16"/>
           <p:cNvSpPr/>
           <p:nvPr/>
         </p:nvSpPr>
@@ -22756,7 +22678,7 @@
       </p:sp>
       <p:sp>
         <p:nvSpPr>
-          <p:cNvPr id="20" name="TextBox 19"/>
+          <p:cNvPr id="18" name="TextBox 17"/>
           <p:cNvSpPr txBox="1"/>
           <p:nvPr/>
         </p:nvSpPr>
@@ -22791,7 +22713,7 @@
       </p:sp>
       <p:sp>
         <p:nvSpPr>
-          <p:cNvPr id="21" name="Oval 20"/>
+          <p:cNvPr id="19" name="Oval 18"/>
           <p:cNvSpPr/>
           <p:nvPr/>
         </p:nvSpPr>
@@ -22835,7 +22757,7 @@
       </p:sp>
       <p:sp>
         <p:nvSpPr>
-          <p:cNvPr id="22" name="TextBox 21"/>
+          <p:cNvPr id="20" name="TextBox 19"/>
           <p:cNvSpPr txBox="1"/>
           <p:nvPr/>
         </p:nvSpPr>
@@ -22870,7 +22792,7 @@
       </p:sp>
       <p:sp>
         <p:nvSpPr>
-          <p:cNvPr id="23" name="Oval 22"/>
+          <p:cNvPr id="21" name="Oval 20"/>
           <p:cNvSpPr/>
           <p:nvPr/>
         </p:nvSpPr>
@@ -22914,7 +22836,7 @@
       </p:sp>
       <p:sp>
         <p:nvSpPr>
-          <p:cNvPr id="24" name="TextBox 23"/>
+          <p:cNvPr id="22" name="TextBox 21"/>
           <p:cNvSpPr txBox="1"/>
           <p:nvPr/>
         </p:nvSpPr>
@@ -22949,7 +22871,7 @@
       </p:sp>
       <p:sp>
         <p:nvSpPr>
-          <p:cNvPr id="25" name="TextBox 24"/>
+          <p:cNvPr id="23" name="TextBox 22"/>
           <p:cNvSpPr txBox="1"/>
           <p:nvPr/>
         </p:nvSpPr>
@@ -25753,7 +25675,7 @@
       </p:sp>
       <p:pic>
         <p:nvPicPr>
-          <p:cNvPr id="9" name="mermaid diagram" descr="75da118c6c09b653.png"/>
+          <p:cNvPr id="9" name="mermaid diagram" descr="61638b4d14f8196c.png"/>
           <p:cNvPicPr>
             <a:picLocks noChangeAspect="1"/>
           </p:cNvPicPr>
@@ -27572,7 +27494,7 @@
       </p:sp>
       <p:pic>
         <p:nvPicPr>
-          <p:cNvPr id="9" name="mermaid diagram" descr="6183dc27bdd6055b.png"/>
+          <p:cNvPr id="9" name="mermaid diagram" descr="12b381e01980df02.png"/>
           <p:cNvPicPr>
             <a:picLocks noChangeAspect="1"/>
           </p:cNvPicPr>
